--- a/Session-1-RP2040-RP2350-Music/FrobelAmFreitag-Session1.pptx
+++ b/Session-1-RP2040-RP2350-Music/FrobelAmFreitag-Session1.pptx
@@ -6,9 +6,14 @@
   </p:sldMasterIdLst>
   <p:sldIdLst>
     <p:sldId id="258" r:id="rId2"/>
-    <p:sldId id="256" r:id="rId3"/>
-    <p:sldId id="257" r:id="rId4"/>
-    <p:sldId id="259" r:id="rId5"/>
+    <p:sldId id="260" r:id="rId3"/>
+    <p:sldId id="265" r:id="rId4"/>
+    <p:sldId id="264" r:id="rId5"/>
+    <p:sldId id="261" r:id="rId6"/>
+    <p:sldId id="263" r:id="rId7"/>
+    <p:sldId id="262" r:id="rId8"/>
+    <p:sldId id="256" r:id="rId9"/>
+    <p:sldId id="257" r:id="rId10"/>
   </p:sldIdLst>
   <p:sldSz cx="12192000" cy="6858000"/>
   <p:notesSz cx="6858000" cy="9144000"/>
@@ -107,6 +112,11 @@
       </a:defRPr>
     </a:lvl9pPr>
   </p:defaultTextStyle>
+  <p:extLst>
+    <p:ext uri="{EFAFB233-063F-42B5-8137-9DF3F51BA10A}">
+      <p15:sldGuideLst xmlns:p15="http://schemas.microsoft.com/office/powerpoint/2012/main"/>
+    </p:ext>
+  </p:extLst>
 </p:presentation>
 </file>
 
@@ -160,7 +170,7 @@
           <a:noFill/>
           <a:extLst>
             <a:ext uri="{909E8E84-426E-40dd-AFC4-6F175D3DCCD1}">
-              <a14:hiddenFill xmlns:a14="http://schemas.microsoft.com/office/drawing/2010/main" xmlns="">
+              <a14:hiddenFill xmlns="" xmlns:a14="http://schemas.microsoft.com/office/drawing/2010/main">
                 <a:solidFill>
                   <a:srgbClr val="FFFFFF"/>
                 </a:solidFill>
@@ -220,7 +230,7 @@
             </a:ln>
             <a:extLst>
               <a:ext uri="{91240B29-F687-4f45-9708-019B960494DF}">
-                <a14:hiddenLine xmlns:a14="http://schemas.microsoft.com/office/drawing/2010/main" xmlns="" w="9525">
+                <a14:hiddenLine xmlns="" xmlns:a14="http://schemas.microsoft.com/office/drawing/2010/main" w="9525">
                   <a:solidFill>
                     <a:srgbClr val="000000"/>
                   </a:solidFill>
@@ -317,7 +327,7 @@
             </a:ln>
             <a:extLst>
               <a:ext uri="{91240B29-F687-4f45-9708-019B960494DF}">
-                <a14:hiddenLine xmlns:a14="http://schemas.microsoft.com/office/drawing/2010/main" xmlns="" w="9525">
+                <a14:hiddenLine xmlns="" xmlns:a14="http://schemas.microsoft.com/office/drawing/2010/main" w="9525">
                   <a:solidFill>
                     <a:srgbClr val="000000"/>
                   </a:solidFill>
@@ -414,7 +424,7 @@
             </a:ln>
             <a:extLst>
               <a:ext uri="{91240B29-F687-4f45-9708-019B960494DF}">
-                <a14:hiddenLine xmlns:a14="http://schemas.microsoft.com/office/drawing/2010/main" xmlns="" w="9525">
+                <a14:hiddenLine xmlns="" xmlns:a14="http://schemas.microsoft.com/office/drawing/2010/main" w="9525">
                   <a:solidFill>
                     <a:srgbClr val="000000"/>
                   </a:solidFill>
@@ -455,7 +465,7 @@
             </a:ln>
             <a:extLst>
               <a:ext uri="{91240B29-F687-4f45-9708-019B960494DF}">
-                <a14:hiddenLine xmlns:a14="http://schemas.microsoft.com/office/drawing/2010/main" xmlns="" w="9525">
+                <a14:hiddenLine xmlns="" xmlns:a14="http://schemas.microsoft.com/office/drawing/2010/main" w="9525">
                   <a:solidFill>
                     <a:srgbClr val="000000"/>
                   </a:solidFill>
@@ -552,7 +562,7 @@
             </a:ln>
             <a:extLst>
               <a:ext uri="{91240B29-F687-4f45-9708-019B960494DF}">
-                <a14:hiddenLine xmlns:a14="http://schemas.microsoft.com/office/drawing/2010/main" xmlns="" w="9525">
+                <a14:hiddenLine xmlns="" xmlns:a14="http://schemas.microsoft.com/office/drawing/2010/main" w="9525">
                   <a:solidFill>
                     <a:srgbClr val="000000"/>
                   </a:solidFill>
@@ -621,7 +631,7 @@
             </a:ln>
             <a:extLst>
               <a:ext uri="{91240B29-F687-4f45-9708-019B960494DF}">
-                <a14:hiddenLine xmlns:a14="http://schemas.microsoft.com/office/drawing/2010/main" xmlns="" w="9525">
+                <a14:hiddenLine xmlns="" xmlns:a14="http://schemas.microsoft.com/office/drawing/2010/main" w="9525">
                   <a:solidFill>
                     <a:srgbClr val="000000"/>
                   </a:solidFill>
@@ -690,7 +700,7 @@
             </a:ln>
             <a:extLst>
               <a:ext uri="{91240B29-F687-4f45-9708-019B960494DF}">
-                <a14:hiddenLine xmlns:a14="http://schemas.microsoft.com/office/drawing/2010/main" xmlns="" w="9525">
+                <a14:hiddenLine xmlns="" xmlns:a14="http://schemas.microsoft.com/office/drawing/2010/main" w="9525">
                   <a:solidFill>
                     <a:srgbClr val="000000"/>
                   </a:solidFill>
@@ -787,7 +797,7 @@
             </a:ln>
             <a:extLst>
               <a:ext uri="{91240B29-F687-4f45-9708-019B960494DF}">
-                <a14:hiddenLine xmlns:a14="http://schemas.microsoft.com/office/drawing/2010/main" xmlns="" w="9525">
+                <a14:hiddenLine xmlns="" xmlns:a14="http://schemas.microsoft.com/office/drawing/2010/main" w="9525">
                   <a:solidFill>
                     <a:srgbClr val="000000"/>
                   </a:solidFill>
@@ -856,7 +866,7 @@
             </a:ln>
             <a:extLst>
               <a:ext uri="{91240B29-F687-4f45-9708-019B960494DF}">
-                <a14:hiddenLine xmlns:a14="http://schemas.microsoft.com/office/drawing/2010/main" xmlns="" w="9525">
+                <a14:hiddenLine xmlns="" xmlns:a14="http://schemas.microsoft.com/office/drawing/2010/main" w="9525">
                   <a:solidFill>
                     <a:srgbClr val="000000"/>
                   </a:solidFill>
@@ -925,7 +935,7 @@
             </a:ln>
             <a:extLst>
               <a:ext uri="{91240B29-F687-4f45-9708-019B960494DF}">
-                <a14:hiddenLine xmlns:a14="http://schemas.microsoft.com/office/drawing/2010/main" xmlns="" w="9525">
+                <a14:hiddenLine xmlns="" xmlns:a14="http://schemas.microsoft.com/office/drawing/2010/main" w="9525">
                   <a:solidFill>
                     <a:srgbClr val="000000"/>
                   </a:solidFill>
@@ -1022,7 +1032,7 @@
             </a:ln>
             <a:extLst>
               <a:ext uri="{91240B29-F687-4f45-9708-019B960494DF}">
-                <a14:hiddenLine xmlns:a14="http://schemas.microsoft.com/office/drawing/2010/main" xmlns="" w="9525">
+                <a14:hiddenLine xmlns="" xmlns:a14="http://schemas.microsoft.com/office/drawing/2010/main" w="9525">
                   <a:solidFill>
                     <a:srgbClr val="000000"/>
                   </a:solidFill>
@@ -1119,7 +1129,7 @@
             </a:ln>
             <a:extLst>
               <a:ext uri="{91240B29-F687-4f45-9708-019B960494DF}">
-                <a14:hiddenLine xmlns:a14="http://schemas.microsoft.com/office/drawing/2010/main" xmlns="" w="9525">
+                <a14:hiddenLine xmlns="" xmlns:a14="http://schemas.microsoft.com/office/drawing/2010/main" w="9525">
                   <a:solidFill>
                     <a:srgbClr val="000000"/>
                   </a:solidFill>
@@ -1188,7 +1198,7 @@
             </a:ln>
             <a:extLst>
               <a:ext uri="{91240B29-F687-4f45-9708-019B960494DF}">
-                <a14:hiddenLine xmlns:a14="http://schemas.microsoft.com/office/drawing/2010/main" xmlns="" w="9525">
+                <a14:hiddenLine xmlns="" xmlns:a14="http://schemas.microsoft.com/office/drawing/2010/main" w="9525">
                   <a:solidFill>
                     <a:srgbClr val="000000"/>
                   </a:solidFill>
@@ -1305,7 +1315,7 @@
             </a:ln>
             <a:extLst>
               <a:ext uri="{91240B29-F687-4f45-9708-019B960494DF}">
-                <a14:hiddenLine xmlns:a14="http://schemas.microsoft.com/office/drawing/2010/main" xmlns="" w="9525">
+                <a14:hiddenLine xmlns="" xmlns:a14="http://schemas.microsoft.com/office/drawing/2010/main" w="9525">
                   <a:solidFill>
                     <a:srgbClr val="000000"/>
                   </a:solidFill>
@@ -1374,7 +1384,7 @@
             </a:ln>
             <a:extLst>
               <a:ext uri="{91240B29-F687-4f45-9708-019B960494DF}">
-                <a14:hiddenLine xmlns:a14="http://schemas.microsoft.com/office/drawing/2010/main" xmlns="" w="9525">
+                <a14:hiddenLine xmlns="" xmlns:a14="http://schemas.microsoft.com/office/drawing/2010/main" w="9525">
                   <a:solidFill>
                     <a:srgbClr val="000000"/>
                   </a:solidFill>
@@ -1471,7 +1481,7 @@
             </a:ln>
             <a:extLst>
               <a:ext uri="{91240B29-F687-4f45-9708-019B960494DF}">
-                <a14:hiddenLine xmlns:a14="http://schemas.microsoft.com/office/drawing/2010/main" xmlns="" w="9525">
+                <a14:hiddenLine xmlns="" xmlns:a14="http://schemas.microsoft.com/office/drawing/2010/main" w="9525">
                   <a:solidFill>
                     <a:srgbClr val="000000"/>
                   </a:solidFill>
@@ -1568,7 +1578,7 @@
             </a:ln>
             <a:extLst>
               <a:ext uri="{91240B29-F687-4f45-9708-019B960494DF}">
-                <a14:hiddenLine xmlns:a14="http://schemas.microsoft.com/office/drawing/2010/main" xmlns="" w="9525">
+                <a14:hiddenLine xmlns="" xmlns:a14="http://schemas.microsoft.com/office/drawing/2010/main" w="9525">
                   <a:solidFill>
                     <a:srgbClr val="000000"/>
                   </a:solidFill>
@@ -1637,7 +1647,7 @@
             </a:ln>
             <a:extLst>
               <a:ext uri="{91240B29-F687-4f45-9708-019B960494DF}">
-                <a14:hiddenLine xmlns:a14="http://schemas.microsoft.com/office/drawing/2010/main" xmlns="" w="9525">
+                <a14:hiddenLine xmlns="" xmlns:a14="http://schemas.microsoft.com/office/drawing/2010/main" w="9525">
                   <a:solidFill>
                     <a:srgbClr val="000000"/>
                   </a:solidFill>
@@ -1734,7 +1744,7 @@
             </a:ln>
             <a:extLst>
               <a:ext uri="{91240B29-F687-4f45-9708-019B960494DF}">
-                <a14:hiddenLine xmlns:a14="http://schemas.microsoft.com/office/drawing/2010/main" xmlns="" w="9525">
+                <a14:hiddenLine xmlns="" xmlns:a14="http://schemas.microsoft.com/office/drawing/2010/main" w="9525">
                   <a:solidFill>
                     <a:srgbClr val="000000"/>
                   </a:solidFill>
@@ -1831,7 +1841,7 @@
             </a:ln>
             <a:extLst>
               <a:ext uri="{91240B29-F687-4f45-9708-019B960494DF}">
-                <a14:hiddenLine xmlns:a14="http://schemas.microsoft.com/office/drawing/2010/main" xmlns="" w="9525">
+                <a14:hiddenLine xmlns="" xmlns:a14="http://schemas.microsoft.com/office/drawing/2010/main" w="9525">
                   <a:solidFill>
                     <a:srgbClr val="000000"/>
                   </a:solidFill>
@@ -1894,7 +1904,7 @@
             </a:ln>
             <a:extLst>
               <a:ext uri="{91240B29-F687-4f45-9708-019B960494DF}">
-                <a14:hiddenLine xmlns:a14="http://schemas.microsoft.com/office/drawing/2010/main" xmlns="" w="9525">
+                <a14:hiddenLine xmlns="" xmlns:a14="http://schemas.microsoft.com/office/drawing/2010/main" w="9525">
                   <a:solidFill>
                     <a:srgbClr val="000000"/>
                   </a:solidFill>
@@ -1991,7 +2001,7 @@
             </a:ln>
             <a:extLst>
               <a:ext uri="{91240B29-F687-4f45-9708-019B960494DF}">
-                <a14:hiddenLine xmlns:a14="http://schemas.microsoft.com/office/drawing/2010/main" xmlns="" w="9525">
+                <a14:hiddenLine xmlns="" xmlns:a14="http://schemas.microsoft.com/office/drawing/2010/main" w="9525">
                   <a:solidFill>
                     <a:srgbClr val="000000"/>
                   </a:solidFill>
@@ -2054,7 +2064,7 @@
             </a:ln>
             <a:extLst>
               <a:ext uri="{91240B29-F687-4f45-9708-019B960494DF}">
-                <a14:hiddenLine xmlns:a14="http://schemas.microsoft.com/office/drawing/2010/main" xmlns="" w="9525">
+                <a14:hiddenLine xmlns="" xmlns:a14="http://schemas.microsoft.com/office/drawing/2010/main" w="9525">
                   <a:solidFill>
                     <a:srgbClr val="000000"/>
                   </a:solidFill>
@@ -2151,7 +2161,7 @@
             </a:ln>
             <a:extLst>
               <a:ext uri="{91240B29-F687-4f45-9708-019B960494DF}">
-                <a14:hiddenLine xmlns:a14="http://schemas.microsoft.com/office/drawing/2010/main" xmlns="" w="9525">
+                <a14:hiddenLine xmlns="" xmlns:a14="http://schemas.microsoft.com/office/drawing/2010/main" w="9525">
                   <a:solidFill>
                     <a:srgbClr val="000000"/>
                   </a:solidFill>
@@ -2226,7 +2236,7 @@
             </a:ln>
             <a:extLst>
               <a:ext uri="{91240B29-F687-4f45-9708-019B960494DF}">
-                <a14:hiddenLine xmlns:a14="http://schemas.microsoft.com/office/drawing/2010/main" xmlns="" w="9525">
+                <a14:hiddenLine xmlns="" xmlns:a14="http://schemas.microsoft.com/office/drawing/2010/main" w="9525">
                   <a:solidFill>
                     <a:srgbClr val="000000"/>
                   </a:solidFill>
@@ -2323,7 +2333,7 @@
             </a:ln>
             <a:extLst>
               <a:ext uri="{91240B29-F687-4f45-9708-019B960494DF}">
-                <a14:hiddenLine xmlns:a14="http://schemas.microsoft.com/office/drawing/2010/main" xmlns="" w="9525">
+                <a14:hiddenLine xmlns="" xmlns:a14="http://schemas.microsoft.com/office/drawing/2010/main" w="9525">
                   <a:solidFill>
                     <a:srgbClr val="000000"/>
                   </a:solidFill>
@@ -2398,7 +2408,7 @@
             </a:ln>
             <a:extLst>
               <a:ext uri="{91240B29-F687-4f45-9708-019B960494DF}">
-                <a14:hiddenLine xmlns:a14="http://schemas.microsoft.com/office/drawing/2010/main" xmlns="" w="9525">
+                <a14:hiddenLine xmlns="" xmlns:a14="http://schemas.microsoft.com/office/drawing/2010/main" w="9525">
                   <a:solidFill>
                     <a:srgbClr val="000000"/>
                   </a:solidFill>
@@ -2495,7 +2505,7 @@
             </a:ln>
             <a:extLst>
               <a:ext uri="{91240B29-F687-4f45-9708-019B960494DF}">
-                <a14:hiddenLine xmlns:a14="http://schemas.microsoft.com/office/drawing/2010/main" xmlns="" w="9525">
+                <a14:hiddenLine xmlns="" xmlns:a14="http://schemas.microsoft.com/office/drawing/2010/main" w="9525">
                   <a:solidFill>
                     <a:srgbClr val="000000"/>
                   </a:solidFill>
@@ -2536,7 +2546,7 @@
             </a:ln>
             <a:extLst>
               <a:ext uri="{91240B29-F687-4f45-9708-019B960494DF}">
-                <a14:hiddenLine xmlns:a14="http://schemas.microsoft.com/office/drawing/2010/main" xmlns="" w="9525">
+                <a14:hiddenLine xmlns="" xmlns:a14="http://schemas.microsoft.com/office/drawing/2010/main" w="9525">
                   <a:solidFill>
                     <a:srgbClr val="000000"/>
                   </a:solidFill>
@@ -2633,7 +2643,7 @@
             </a:ln>
             <a:extLst>
               <a:ext uri="{91240B29-F687-4f45-9708-019B960494DF}">
-                <a14:hiddenLine xmlns:a14="http://schemas.microsoft.com/office/drawing/2010/main" xmlns="" w="9525">
+                <a14:hiddenLine xmlns="" xmlns:a14="http://schemas.microsoft.com/office/drawing/2010/main" w="9525">
                   <a:solidFill>
                     <a:srgbClr val="000000"/>
                   </a:solidFill>
@@ -2702,7 +2712,7 @@
             </a:ln>
             <a:extLst>
               <a:ext uri="{91240B29-F687-4f45-9708-019B960494DF}">
-                <a14:hiddenLine xmlns:a14="http://schemas.microsoft.com/office/drawing/2010/main" xmlns="" w="9525">
+                <a14:hiddenLine xmlns="" xmlns:a14="http://schemas.microsoft.com/office/drawing/2010/main" w="9525">
                   <a:solidFill>
                     <a:srgbClr val="000000"/>
                   </a:solidFill>
@@ -2771,7 +2781,7 @@
             </a:ln>
             <a:extLst>
               <a:ext uri="{91240B29-F687-4f45-9708-019B960494DF}">
-                <a14:hiddenLine xmlns:a14="http://schemas.microsoft.com/office/drawing/2010/main" xmlns="" w="9525">
+                <a14:hiddenLine xmlns="" xmlns:a14="http://schemas.microsoft.com/office/drawing/2010/main" w="9525">
                   <a:solidFill>
                     <a:srgbClr val="000000"/>
                   </a:solidFill>
@@ -2868,7 +2878,7 @@
             </a:ln>
             <a:extLst>
               <a:ext uri="{91240B29-F687-4f45-9708-019B960494DF}">
-                <a14:hiddenLine xmlns:a14="http://schemas.microsoft.com/office/drawing/2010/main" xmlns="" w="9525">
+                <a14:hiddenLine xmlns="" xmlns:a14="http://schemas.microsoft.com/office/drawing/2010/main" w="9525">
                   <a:solidFill>
                     <a:srgbClr val="000000"/>
                   </a:solidFill>
@@ -2943,7 +2953,7 @@
             </a:ln>
             <a:extLst>
               <a:ext uri="{91240B29-F687-4f45-9708-019B960494DF}">
-                <a14:hiddenLine xmlns:a14="http://schemas.microsoft.com/office/drawing/2010/main" xmlns="" w="9525">
+                <a14:hiddenLine xmlns="" xmlns:a14="http://schemas.microsoft.com/office/drawing/2010/main" w="9525">
                   <a:solidFill>
                     <a:srgbClr val="000000"/>
                   </a:solidFill>
@@ -3012,7 +3022,7 @@
             </a:ln>
             <a:extLst>
               <a:ext uri="{91240B29-F687-4f45-9708-019B960494DF}">
-                <a14:hiddenLine xmlns:a14="http://schemas.microsoft.com/office/drawing/2010/main" xmlns="" w="9525">
+                <a14:hiddenLine xmlns="" xmlns:a14="http://schemas.microsoft.com/office/drawing/2010/main" w="9525">
                   <a:solidFill>
                     <a:srgbClr val="000000"/>
                   </a:solidFill>
@@ -3109,7 +3119,7 @@
             </a:ln>
             <a:extLst>
               <a:ext uri="{91240B29-F687-4f45-9708-019B960494DF}">
-                <a14:hiddenLine xmlns:a14="http://schemas.microsoft.com/office/drawing/2010/main" xmlns="" w="9525">
+                <a14:hiddenLine xmlns="" xmlns:a14="http://schemas.microsoft.com/office/drawing/2010/main" w="9525">
                   <a:solidFill>
                     <a:srgbClr val="000000"/>
                   </a:solidFill>
@@ -3178,7 +3188,7 @@
             </a:ln>
             <a:extLst>
               <a:ext uri="{91240B29-F687-4f45-9708-019B960494DF}">
-                <a14:hiddenLine xmlns:a14="http://schemas.microsoft.com/office/drawing/2010/main" xmlns="" w="9525">
+                <a14:hiddenLine xmlns="" xmlns:a14="http://schemas.microsoft.com/office/drawing/2010/main" w="9525">
                   <a:solidFill>
                     <a:srgbClr val="000000"/>
                   </a:solidFill>
@@ -3275,7 +3285,7 @@
             </a:ln>
             <a:extLst>
               <a:ext uri="{91240B29-F687-4f45-9708-019B960494DF}">
-                <a14:hiddenLine xmlns:a14="http://schemas.microsoft.com/office/drawing/2010/main" xmlns="" w="9525">
+                <a14:hiddenLine xmlns="" xmlns:a14="http://schemas.microsoft.com/office/drawing/2010/main" w="9525">
                   <a:solidFill>
                     <a:srgbClr val="000000"/>
                   </a:solidFill>
@@ -3344,7 +3354,7 @@
             </a:ln>
             <a:extLst>
               <a:ext uri="{91240B29-F687-4f45-9708-019B960494DF}">
-                <a14:hiddenLine xmlns:a14="http://schemas.microsoft.com/office/drawing/2010/main" xmlns="" w="9525">
+                <a14:hiddenLine xmlns="" xmlns:a14="http://schemas.microsoft.com/office/drawing/2010/main" w="9525">
                   <a:solidFill>
                     <a:srgbClr val="000000"/>
                   </a:solidFill>
@@ -3441,7 +3451,7 @@
             </a:ln>
             <a:extLst>
               <a:ext uri="{91240B29-F687-4f45-9708-019B960494DF}">
-                <a14:hiddenLine xmlns:a14="http://schemas.microsoft.com/office/drawing/2010/main" xmlns="" w="9525">
+                <a14:hiddenLine xmlns="" xmlns:a14="http://schemas.microsoft.com/office/drawing/2010/main" w="9525">
                   <a:solidFill>
                     <a:srgbClr val="000000"/>
                   </a:solidFill>
@@ -3482,7 +3492,7 @@
             </a:ln>
             <a:extLst>
               <a:ext uri="{91240B29-F687-4f45-9708-019B960494DF}">
-                <a14:hiddenLine xmlns:a14="http://schemas.microsoft.com/office/drawing/2010/main" xmlns="" w="9525">
+                <a14:hiddenLine xmlns="" xmlns:a14="http://schemas.microsoft.com/office/drawing/2010/main" w="9525">
                   <a:solidFill>
                     <a:srgbClr val="000000"/>
                   </a:solidFill>
@@ -3554,7 +3564,7 @@
             </a:ln>
             <a:extLst>
               <a:ext uri="{91240B29-F687-4f45-9708-019B960494DF}">
-                <a14:hiddenLine xmlns:a14="http://schemas.microsoft.com/office/drawing/2010/main" xmlns="" w="9525">
+                <a14:hiddenLine xmlns="" xmlns:a14="http://schemas.microsoft.com/office/drawing/2010/main" w="9525">
                   <a:solidFill>
                     <a:srgbClr val="000000"/>
                   </a:solidFill>
@@ -3651,7 +3661,7 @@
             </a:ln>
             <a:extLst>
               <a:ext uri="{91240B29-F687-4f45-9708-019B960494DF}">
-                <a14:hiddenLine xmlns:a14="http://schemas.microsoft.com/office/drawing/2010/main" xmlns="" w="9525">
+                <a14:hiddenLine xmlns="" xmlns:a14="http://schemas.microsoft.com/office/drawing/2010/main" w="9525">
                   <a:solidFill>
                     <a:srgbClr val="000000"/>
                   </a:solidFill>
@@ -3720,7 +3730,7 @@
             </a:ln>
             <a:extLst>
               <a:ext uri="{91240B29-F687-4f45-9708-019B960494DF}">
-                <a14:hiddenLine xmlns:a14="http://schemas.microsoft.com/office/drawing/2010/main" xmlns="" w="9525">
+                <a14:hiddenLine xmlns="" xmlns:a14="http://schemas.microsoft.com/office/drawing/2010/main" w="9525">
                   <a:solidFill>
                     <a:srgbClr val="000000"/>
                   </a:solidFill>
@@ -3817,7 +3827,7 @@
             </a:ln>
             <a:extLst>
               <a:ext uri="{91240B29-F687-4f45-9708-019B960494DF}">
-                <a14:hiddenLine xmlns:a14="http://schemas.microsoft.com/office/drawing/2010/main" xmlns="" w="9525">
+                <a14:hiddenLine xmlns="" xmlns:a14="http://schemas.microsoft.com/office/drawing/2010/main" w="9525">
                   <a:solidFill>
                     <a:srgbClr val="000000"/>
                   </a:solidFill>
@@ -3914,7 +3924,7 @@
             </a:ln>
             <a:extLst>
               <a:ext uri="{91240B29-F687-4f45-9708-019B960494DF}">
-                <a14:hiddenLine xmlns:a14="http://schemas.microsoft.com/office/drawing/2010/main" xmlns="" w="9525">
+                <a14:hiddenLine xmlns="" xmlns:a14="http://schemas.microsoft.com/office/drawing/2010/main" w="9525">
                   <a:solidFill>
                     <a:srgbClr val="000000"/>
                   </a:solidFill>
@@ -3986,7 +3996,7 @@
             </a:ln>
             <a:extLst>
               <a:ext uri="{91240B29-F687-4f45-9708-019B960494DF}">
-                <a14:hiddenLine xmlns:a14="http://schemas.microsoft.com/office/drawing/2010/main" xmlns="" w="9525">
+                <a14:hiddenLine xmlns="" xmlns:a14="http://schemas.microsoft.com/office/drawing/2010/main" w="9525">
                   <a:solidFill>
                     <a:srgbClr val="000000"/>
                   </a:solidFill>
@@ -4055,7 +4065,7 @@
             </a:ln>
             <a:extLst>
               <a:ext uri="{91240B29-F687-4f45-9708-019B960494DF}">
-                <a14:hiddenLine xmlns:a14="http://schemas.microsoft.com/office/drawing/2010/main" xmlns="" w="9525">
+                <a14:hiddenLine xmlns="" xmlns:a14="http://schemas.microsoft.com/office/drawing/2010/main" w="9525">
                   <a:solidFill>
                     <a:srgbClr val="000000"/>
                   </a:solidFill>
@@ -4152,7 +4162,7 @@
             </a:ln>
             <a:extLst>
               <a:ext uri="{91240B29-F687-4f45-9708-019B960494DF}">
-                <a14:hiddenLine xmlns:a14="http://schemas.microsoft.com/office/drawing/2010/main" xmlns="" w="9525">
+                <a14:hiddenLine xmlns="" xmlns:a14="http://schemas.microsoft.com/office/drawing/2010/main" w="9525">
                   <a:solidFill>
                     <a:srgbClr val="000000"/>
                   </a:solidFill>
@@ -4249,7 +4259,7 @@
             </a:ln>
             <a:extLst>
               <a:ext uri="{91240B29-F687-4f45-9708-019B960494DF}">
-                <a14:hiddenLine xmlns:a14="http://schemas.microsoft.com/office/drawing/2010/main" xmlns="" w="9525">
+                <a14:hiddenLine xmlns="" xmlns:a14="http://schemas.microsoft.com/office/drawing/2010/main" w="9525">
                   <a:solidFill>
                     <a:srgbClr val="000000"/>
                   </a:solidFill>
@@ -4318,7 +4328,7 @@
             </a:ln>
             <a:extLst>
               <a:ext uri="{91240B29-F687-4f45-9708-019B960494DF}">
-                <a14:hiddenLine xmlns:a14="http://schemas.microsoft.com/office/drawing/2010/main" xmlns="" w="9525">
+                <a14:hiddenLine xmlns="" xmlns:a14="http://schemas.microsoft.com/office/drawing/2010/main" w="9525">
                   <a:solidFill>
                     <a:srgbClr val="000000"/>
                   </a:solidFill>
@@ -4445,7 +4455,7 @@
             </a:ln>
             <a:extLst>
               <a:ext uri="{91240B29-F687-4f45-9708-019B960494DF}">
-                <a14:hiddenLine xmlns:a14="http://schemas.microsoft.com/office/drawing/2010/main" xmlns="" w="9525">
+                <a14:hiddenLine xmlns="" xmlns:a14="http://schemas.microsoft.com/office/drawing/2010/main" w="9525">
                   <a:solidFill>
                     <a:srgbClr val="000000"/>
                   </a:solidFill>
@@ -4520,7 +4530,7 @@
             </a:ln>
             <a:extLst>
               <a:ext uri="{91240B29-F687-4f45-9708-019B960494DF}">
-                <a14:hiddenLine xmlns:a14="http://schemas.microsoft.com/office/drawing/2010/main" xmlns="" w="9525">
+                <a14:hiddenLine xmlns="" xmlns:a14="http://schemas.microsoft.com/office/drawing/2010/main" w="9525">
                   <a:solidFill>
                     <a:srgbClr val="000000"/>
                   </a:solidFill>
@@ -4617,7 +4627,7 @@
             </a:ln>
             <a:extLst>
               <a:ext uri="{91240B29-F687-4f45-9708-019B960494DF}">
-                <a14:hiddenLine xmlns:a14="http://schemas.microsoft.com/office/drawing/2010/main" xmlns="" w="9525">
+                <a14:hiddenLine xmlns="" xmlns:a14="http://schemas.microsoft.com/office/drawing/2010/main" w="9525">
                   <a:solidFill>
                     <a:srgbClr val="000000"/>
                   </a:solidFill>
@@ -4764,7 +4774,7 @@
           <a:p>
             <a:fld id="{48A87A34-81AB-432B-8DAE-1953F412C126}" type="datetimeFigureOut">
               <a:rPr lang="en-US" dirty="0"/>
-              <a:t>3/13/26</a:t>
+              <a:t>3/19/26</a:t>
             </a:fld>
             <a:endParaRPr lang="en-US" dirty="0"/>
           </a:p>
@@ -4816,7 +4826,7 @@
           <a:p>
             <a:fld id="{6D22F896-40B5-4ADD-8801-0D06FADFA095}" type="slidenum">
               <a:rPr lang="en-US" dirty="0"/>
-              <a:t>‹#›</a:t>
+              <a:t>‹nr.›</a:t>
             </a:fld>
             <a:endParaRPr lang="en-US" dirty="0"/>
           </a:p>
@@ -5026,7 +5036,7 @@
           <a:p>
             <a:fld id="{48A87A34-81AB-432B-8DAE-1953F412C126}" type="datetimeFigureOut">
               <a:rPr lang="en-US" dirty="0"/>
-              <a:t>3/13/26</a:t>
+              <a:t>3/19/26</a:t>
             </a:fld>
             <a:endParaRPr lang="en-US" dirty="0"/>
           </a:p>
@@ -5068,7 +5078,7 @@
           <a:p>
             <a:fld id="{6D22F896-40B5-4ADD-8801-0D06FADFA095}" type="slidenum">
               <a:rPr lang="en-US" dirty="0"/>
-              <a:t>‹#›</a:t>
+              <a:t>‹nr.›</a:t>
             </a:fld>
             <a:endParaRPr lang="en-US" dirty="0"/>
           </a:p>
@@ -5217,7 +5227,7 @@
           <a:p>
             <a:fld id="{48A87A34-81AB-432B-8DAE-1953F412C126}" type="datetimeFigureOut">
               <a:rPr lang="en-US" dirty="0"/>
-              <a:t>3/13/26</a:t>
+              <a:t>3/19/26</a:t>
             </a:fld>
             <a:endParaRPr lang="en-US" dirty="0"/>
           </a:p>
@@ -5259,7 +5269,7 @@
           <a:p>
             <a:fld id="{6D22F896-40B5-4ADD-8801-0D06FADFA095}" type="slidenum">
               <a:rPr lang="en-US" dirty="0"/>
-              <a:t>‹#›</a:t>
+              <a:t>‹nr.›</a:t>
             </a:fld>
             <a:endParaRPr lang="en-US" dirty="0"/>
           </a:p>
@@ -5475,7 +5485,7 @@
           <a:p>
             <a:fld id="{48A87A34-81AB-432B-8DAE-1953F412C126}" type="datetimeFigureOut">
               <a:rPr lang="en-US" dirty="0"/>
-              <a:t>3/13/26</a:t>
+              <a:t>3/19/26</a:t>
             </a:fld>
             <a:endParaRPr lang="en-US" dirty="0"/>
           </a:p>
@@ -5517,7 +5527,7 @@
           <a:p>
             <a:fld id="{6D22F896-40B5-4ADD-8801-0D06FADFA095}" type="slidenum">
               <a:rPr lang="en-US" dirty="0"/>
-              <a:t>‹#›</a:t>
+              <a:t>‹nr.›</a:t>
             </a:fld>
             <a:endParaRPr lang="en-US" dirty="0"/>
           </a:p>
@@ -5904,7 +5914,7 @@
           <a:p>
             <a:fld id="{48A87A34-81AB-432B-8DAE-1953F412C126}" type="datetimeFigureOut">
               <a:rPr lang="en-US" dirty="0"/>
-              <a:t>3/13/26</a:t>
+              <a:t>3/19/26</a:t>
             </a:fld>
             <a:endParaRPr lang="en-US" dirty="0"/>
           </a:p>
@@ -5946,7 +5956,7 @@
           <a:p>
             <a:fld id="{6D22F896-40B5-4ADD-8801-0D06FADFA095}" type="slidenum">
               <a:rPr lang="en-US" dirty="0"/>
-              <a:t>‹#›</a:t>
+              <a:t>‹nr.›</a:t>
             </a:fld>
             <a:endParaRPr lang="en-US" dirty="0"/>
           </a:p>
@@ -6445,7 +6455,7 @@
           <a:p>
             <a:fld id="{48A87A34-81AB-432B-8DAE-1953F412C126}" type="datetimeFigureOut">
               <a:rPr lang="en-US" dirty="0"/>
-              <a:t>3/13/26</a:t>
+              <a:t>3/19/26</a:t>
             </a:fld>
             <a:endParaRPr lang="en-US" dirty="0"/>
           </a:p>
@@ -6487,7 +6497,7 @@
           <a:p>
             <a:fld id="{6D22F896-40B5-4ADD-8801-0D06FADFA095}" type="slidenum">
               <a:rPr lang="en-US" dirty="0"/>
-              <a:t>‹#›</a:t>
+              <a:t>‹nr.›</a:t>
             </a:fld>
             <a:endParaRPr lang="en-US" dirty="0"/>
           </a:p>
@@ -7160,7 +7170,7 @@
           <a:p>
             <a:fld id="{48A87A34-81AB-432B-8DAE-1953F412C126}" type="datetimeFigureOut">
               <a:rPr lang="en-US" dirty="0"/>
-              <a:t>3/13/26</a:t>
+              <a:t>3/19/26</a:t>
             </a:fld>
             <a:endParaRPr lang="en-US" dirty="0"/>
           </a:p>
@@ -7202,7 +7212,7 @@
           <a:p>
             <a:fld id="{6D22F896-40B5-4ADD-8801-0D06FADFA095}" type="slidenum">
               <a:rPr lang="en-US" dirty="0"/>
-              <a:t>‹#›</a:t>
+              <a:t>‹nr.›</a:t>
             </a:fld>
             <a:endParaRPr lang="en-US" dirty="0"/>
           </a:p>
@@ -7325,7 +7335,7 @@
           <a:p>
             <a:fld id="{48A87A34-81AB-432B-8DAE-1953F412C126}" type="datetimeFigureOut">
               <a:rPr lang="en-US" dirty="0"/>
-              <a:t>3/13/26</a:t>
+              <a:t>3/19/26</a:t>
             </a:fld>
             <a:endParaRPr lang="en-US" dirty="0"/>
           </a:p>
@@ -7367,7 +7377,7 @@
           <a:p>
             <a:fld id="{6D22F896-40B5-4ADD-8801-0D06FADFA095}" type="slidenum">
               <a:rPr lang="en-US" dirty="0"/>
-              <a:t>‹#›</a:t>
+              <a:t>‹nr.›</a:t>
             </a:fld>
             <a:endParaRPr lang="en-US" dirty="0"/>
           </a:p>
@@ -7500,7 +7510,7 @@
           <a:p>
             <a:fld id="{48A87A34-81AB-432B-8DAE-1953F412C126}" type="datetimeFigureOut">
               <a:rPr lang="en-US" dirty="0"/>
-              <a:t>3/13/26</a:t>
+              <a:t>3/19/26</a:t>
             </a:fld>
             <a:endParaRPr lang="en-US" dirty="0"/>
           </a:p>
@@ -7542,7 +7552,7 @@
           <a:p>
             <a:fld id="{6D22F896-40B5-4ADD-8801-0D06FADFA095}" type="slidenum">
               <a:rPr lang="en-US" dirty="0"/>
-              <a:t>‹#›</a:t>
+              <a:t>‹nr.›</a:t>
             </a:fld>
             <a:endParaRPr lang="en-US" dirty="0"/>
           </a:p>
@@ -7665,7 +7675,7 @@
           <a:p>
             <a:fld id="{48A87A34-81AB-432B-8DAE-1953F412C126}" type="datetimeFigureOut">
               <a:rPr lang="en-US" dirty="0"/>
-              <a:t>3/13/26</a:t>
+              <a:t>3/19/26</a:t>
             </a:fld>
             <a:endParaRPr lang="en-US" dirty="0"/>
           </a:p>
@@ -7707,7 +7717,7 @@
           <a:p>
             <a:fld id="{6D22F896-40B5-4ADD-8801-0D06FADFA095}" type="slidenum">
               <a:rPr lang="en-US" dirty="0"/>
-              <a:t>‹#›</a:t>
+              <a:t>‹nr.›</a:t>
             </a:fld>
             <a:endParaRPr lang="en-US" dirty="0"/>
           </a:p>
@@ -7910,7 +7920,7 @@
           <a:p>
             <a:fld id="{48A87A34-81AB-432B-8DAE-1953F412C126}" type="datetimeFigureOut">
               <a:rPr lang="en-US" dirty="0"/>
-              <a:t>3/13/26</a:t>
+              <a:t>3/19/26</a:t>
             </a:fld>
             <a:endParaRPr lang="en-US" dirty="0"/>
           </a:p>
@@ -7952,7 +7962,7 @@
           <a:p>
             <a:fld id="{6D22F896-40B5-4ADD-8801-0D06FADFA095}" type="slidenum">
               <a:rPr lang="en-US" dirty="0"/>
-              <a:t>‹#›</a:t>
+              <a:t>‹nr.›</a:t>
             </a:fld>
             <a:endParaRPr lang="en-US" dirty="0"/>
           </a:p>
@@ -8137,7 +8147,7 @@
           <a:p>
             <a:fld id="{48A87A34-81AB-432B-8DAE-1953F412C126}" type="datetimeFigureOut">
               <a:rPr lang="en-US" dirty="0"/>
-              <a:t>3/13/26</a:t>
+              <a:t>3/19/26</a:t>
             </a:fld>
             <a:endParaRPr lang="en-US" dirty="0"/>
           </a:p>
@@ -8179,7 +8189,7 @@
           <a:p>
             <a:fld id="{6D22F896-40B5-4ADD-8801-0D06FADFA095}" type="slidenum">
               <a:rPr lang="en-US" dirty="0"/>
-              <a:t>‹#›</a:t>
+              <a:t>‹nr.›</a:t>
             </a:fld>
             <a:endParaRPr lang="en-US" dirty="0"/>
           </a:p>
@@ -8513,7 +8523,7 @@
           <a:p>
             <a:fld id="{48A87A34-81AB-432B-8DAE-1953F412C126}" type="datetimeFigureOut">
               <a:rPr lang="en-US" dirty="0"/>
-              <a:t>3/13/26</a:t>
+              <a:t>3/19/26</a:t>
             </a:fld>
             <a:endParaRPr lang="en-US" dirty="0"/>
           </a:p>
@@ -8555,7 +8565,7 @@
           <a:p>
             <a:fld id="{6D22F896-40B5-4ADD-8801-0D06FADFA095}" type="slidenum">
               <a:rPr lang="en-US" dirty="0"/>
-              <a:t>‹#›</a:t>
+              <a:t>‹nr.›</a:t>
             </a:fld>
             <a:endParaRPr lang="en-US" dirty="0"/>
           </a:p>
@@ -8626,7 +8636,7 @@
           <a:p>
             <a:fld id="{48A87A34-81AB-432B-8DAE-1953F412C126}" type="datetimeFigureOut">
               <a:rPr lang="en-US" dirty="0"/>
-              <a:t>3/13/26</a:t>
+              <a:t>3/19/26</a:t>
             </a:fld>
             <a:endParaRPr lang="en-US" dirty="0"/>
           </a:p>
@@ -8668,7 +8678,7 @@
           <a:p>
             <a:fld id="{6D22F896-40B5-4ADD-8801-0D06FADFA095}" type="slidenum">
               <a:rPr lang="en-US" dirty="0"/>
-              <a:t>‹#›</a:t>
+              <a:t>‹nr.›</a:t>
             </a:fld>
             <a:endParaRPr lang="en-US" dirty="0"/>
           </a:p>
@@ -8716,7 +8726,7 @@
           <a:p>
             <a:fld id="{48A87A34-81AB-432B-8DAE-1953F412C126}" type="datetimeFigureOut">
               <a:rPr lang="en-US" dirty="0"/>
-              <a:t>3/13/26</a:t>
+              <a:t>3/19/26</a:t>
             </a:fld>
             <a:endParaRPr lang="en-US" dirty="0"/>
           </a:p>
@@ -8758,7 +8768,7 @@
           <a:p>
             <a:fld id="{6D22F896-40B5-4ADD-8801-0D06FADFA095}" type="slidenum">
               <a:rPr lang="en-US" dirty="0"/>
-              <a:t>‹#›</a:t>
+              <a:t>‹nr.›</a:t>
             </a:fld>
             <a:endParaRPr lang="en-US" dirty="0"/>
           </a:p>
@@ -8960,7 +8970,7 @@
           <a:p>
             <a:fld id="{48A87A34-81AB-432B-8DAE-1953F412C126}" type="datetimeFigureOut">
               <a:rPr lang="en-US" dirty="0"/>
-              <a:t>3/13/26</a:t>
+              <a:t>3/19/26</a:t>
             </a:fld>
             <a:endParaRPr lang="en-US" dirty="0"/>
           </a:p>
@@ -9002,7 +9012,7 @@
           <a:p>
             <a:fld id="{6D22F896-40B5-4ADD-8801-0D06FADFA095}" type="slidenum">
               <a:rPr lang="en-US" dirty="0"/>
-              <a:t>‹#›</a:t>
+              <a:t>‹nr.›</a:t>
             </a:fld>
             <a:endParaRPr lang="en-US" dirty="0"/>
           </a:p>
@@ -9235,7 +9245,7 @@
           <a:p>
             <a:fld id="{48A87A34-81AB-432B-8DAE-1953F412C126}" type="datetimeFigureOut">
               <a:rPr lang="en-US" dirty="0"/>
-              <a:t>3/13/26</a:t>
+              <a:t>3/19/26</a:t>
             </a:fld>
             <a:endParaRPr lang="en-US" dirty="0"/>
           </a:p>
@@ -9277,7 +9287,7 @@
           <a:p>
             <a:fld id="{6D22F896-40B5-4ADD-8801-0D06FADFA095}" type="slidenum">
               <a:rPr lang="en-US" dirty="0"/>
-              <a:t>‹#›</a:t>
+              <a:t>‹nr.›</a:t>
             </a:fld>
             <a:endParaRPr lang="en-US" dirty="0"/>
           </a:p>
@@ -9346,7 +9356,7 @@
           <a:noFill/>
           <a:extLst>
             <a:ext uri="{909E8E84-426E-40dd-AFC4-6F175D3DCCD1}">
-              <a14:hiddenFill xmlns:a14="http://schemas.microsoft.com/office/drawing/2010/main" xmlns="">
+              <a14:hiddenFill xmlns="" xmlns:a14="http://schemas.microsoft.com/office/drawing/2010/main">
                 <a:solidFill>
                   <a:srgbClr val="FFFFFF"/>
                 </a:solidFill>
@@ -9420,7 +9430,7 @@
               </a:ln>
               <a:extLst>
                 <a:ext uri="{91240B29-F687-4f45-9708-019B960494DF}">
-                  <a14:hiddenLine xmlns:a14="http://schemas.microsoft.com/office/drawing/2010/main" xmlns="" w="9525">
+                  <a14:hiddenLine xmlns="" xmlns:a14="http://schemas.microsoft.com/office/drawing/2010/main" w="9525">
                     <a:solidFill>
                       <a:srgbClr val="000000"/>
                     </a:solidFill>
@@ -9517,7 +9527,7 @@
               </a:ln>
               <a:extLst>
                 <a:ext uri="{91240B29-F687-4f45-9708-019B960494DF}">
-                  <a14:hiddenLine xmlns:a14="http://schemas.microsoft.com/office/drawing/2010/main" xmlns="" w="9525">
+                  <a14:hiddenLine xmlns="" xmlns:a14="http://schemas.microsoft.com/office/drawing/2010/main" w="9525">
                     <a:solidFill>
                       <a:srgbClr val="000000"/>
                     </a:solidFill>
@@ -9614,7 +9624,7 @@
               </a:ln>
               <a:extLst>
                 <a:ext uri="{91240B29-F687-4f45-9708-019B960494DF}">
-                  <a14:hiddenLine xmlns:a14="http://schemas.microsoft.com/office/drawing/2010/main" xmlns="" w="9525">
+                  <a14:hiddenLine xmlns="" xmlns:a14="http://schemas.microsoft.com/office/drawing/2010/main" w="9525">
                     <a:solidFill>
                       <a:srgbClr val="000000"/>
                     </a:solidFill>
@@ -9683,7 +9693,7 @@
               </a:ln>
               <a:extLst>
                 <a:ext uri="{91240B29-F687-4f45-9708-019B960494DF}">
-                  <a14:hiddenLine xmlns:a14="http://schemas.microsoft.com/office/drawing/2010/main" xmlns="" w="9525">
+                  <a14:hiddenLine xmlns="" xmlns:a14="http://schemas.microsoft.com/office/drawing/2010/main" w="9525">
                     <a:solidFill>
                       <a:srgbClr val="000000"/>
                     </a:solidFill>
@@ -9780,7 +9790,7 @@
               </a:ln>
               <a:extLst>
                 <a:ext uri="{91240B29-F687-4f45-9708-019B960494DF}">
-                  <a14:hiddenLine xmlns:a14="http://schemas.microsoft.com/office/drawing/2010/main" xmlns="" w="9525">
+                  <a14:hiddenLine xmlns="" xmlns:a14="http://schemas.microsoft.com/office/drawing/2010/main" w="9525">
                     <a:solidFill>
                       <a:srgbClr val="000000"/>
                     </a:solidFill>
@@ -9849,7 +9859,7 @@
               </a:ln>
               <a:extLst>
                 <a:ext uri="{91240B29-F687-4f45-9708-019B960494DF}">
-                  <a14:hiddenLine xmlns:a14="http://schemas.microsoft.com/office/drawing/2010/main" xmlns="" w="9525">
+                  <a14:hiddenLine xmlns="" xmlns:a14="http://schemas.microsoft.com/office/drawing/2010/main" w="9525">
                     <a:solidFill>
                       <a:srgbClr val="000000"/>
                     </a:solidFill>
@@ -9918,7 +9928,7 @@
               </a:ln>
               <a:extLst>
                 <a:ext uri="{91240B29-F687-4f45-9708-019B960494DF}">
-                  <a14:hiddenLine xmlns:a14="http://schemas.microsoft.com/office/drawing/2010/main" xmlns="" w="9525">
+                  <a14:hiddenLine xmlns="" xmlns:a14="http://schemas.microsoft.com/office/drawing/2010/main" w="9525">
                     <a:solidFill>
                       <a:srgbClr val="000000"/>
                     </a:solidFill>
@@ -10015,7 +10025,7 @@
               </a:ln>
               <a:extLst>
                 <a:ext uri="{91240B29-F687-4f45-9708-019B960494DF}">
-                  <a14:hiddenLine xmlns:a14="http://schemas.microsoft.com/office/drawing/2010/main" xmlns="" w="9525">
+                  <a14:hiddenLine xmlns="" xmlns:a14="http://schemas.microsoft.com/office/drawing/2010/main" w="9525">
                     <a:solidFill>
                       <a:srgbClr val="000000"/>
                     </a:solidFill>
@@ -10112,7 +10122,7 @@
               </a:ln>
               <a:extLst>
                 <a:ext uri="{91240B29-F687-4f45-9708-019B960494DF}">
-                  <a14:hiddenLine xmlns:a14="http://schemas.microsoft.com/office/drawing/2010/main" xmlns="" w="9525">
+                  <a14:hiddenLine xmlns="" xmlns:a14="http://schemas.microsoft.com/office/drawing/2010/main" w="9525">
                     <a:solidFill>
                       <a:srgbClr val="000000"/>
                     </a:solidFill>
@@ -10181,7 +10191,7 @@
               </a:ln>
               <a:extLst>
                 <a:ext uri="{91240B29-F687-4f45-9708-019B960494DF}">
-                  <a14:hiddenLine xmlns:a14="http://schemas.microsoft.com/office/drawing/2010/main" xmlns="" w="9525">
+                  <a14:hiddenLine xmlns="" xmlns:a14="http://schemas.microsoft.com/office/drawing/2010/main" w="9525">
                     <a:solidFill>
                       <a:srgbClr val="000000"/>
                     </a:solidFill>
@@ -10298,7 +10308,7 @@
               </a:ln>
               <a:extLst>
                 <a:ext uri="{91240B29-F687-4f45-9708-019B960494DF}">
-                  <a14:hiddenLine xmlns:a14="http://schemas.microsoft.com/office/drawing/2010/main" xmlns="" w="9525">
+                  <a14:hiddenLine xmlns="" xmlns:a14="http://schemas.microsoft.com/office/drawing/2010/main" w="9525">
                     <a:solidFill>
                       <a:srgbClr val="000000"/>
                     </a:solidFill>
@@ -10396,7 +10406,7 @@
               </a:ln>
               <a:extLst>
                 <a:ext uri="{91240B29-F687-4f45-9708-019B960494DF}">
-                  <a14:hiddenLine xmlns:a14="http://schemas.microsoft.com/office/drawing/2010/main" xmlns="" w="9525">
+                  <a14:hiddenLine xmlns="" xmlns:a14="http://schemas.microsoft.com/office/drawing/2010/main" w="9525">
                     <a:solidFill>
                       <a:srgbClr val="000000"/>
                     </a:solidFill>
@@ -10465,7 +10475,7 @@
               </a:ln>
               <a:extLst>
                 <a:ext uri="{91240B29-F687-4f45-9708-019B960494DF}">
-                  <a14:hiddenLine xmlns:a14="http://schemas.microsoft.com/office/drawing/2010/main" xmlns="" w="9525">
+                  <a14:hiddenLine xmlns="" xmlns:a14="http://schemas.microsoft.com/office/drawing/2010/main" w="9525">
                     <a:solidFill>
                       <a:srgbClr val="000000"/>
                     </a:solidFill>
@@ -10534,7 +10544,7 @@
               </a:ln>
               <a:extLst>
                 <a:ext uri="{91240B29-F687-4f45-9708-019B960494DF}">
-                  <a14:hiddenLine xmlns:a14="http://schemas.microsoft.com/office/drawing/2010/main" xmlns="" w="9525">
+                  <a14:hiddenLine xmlns="" xmlns:a14="http://schemas.microsoft.com/office/drawing/2010/main" w="9525">
                     <a:solidFill>
                       <a:srgbClr val="000000"/>
                     </a:solidFill>
@@ -10631,7 +10641,7 @@
               </a:ln>
               <a:extLst>
                 <a:ext uri="{91240B29-F687-4f45-9708-019B960494DF}">
-                  <a14:hiddenLine xmlns:a14="http://schemas.microsoft.com/office/drawing/2010/main" xmlns="" w="9525">
+                  <a14:hiddenLine xmlns="" xmlns:a14="http://schemas.microsoft.com/office/drawing/2010/main" w="9525">
                     <a:solidFill>
                       <a:srgbClr val="000000"/>
                     </a:solidFill>
@@ -10672,7 +10682,7 @@
               </a:ln>
               <a:extLst>
                 <a:ext uri="{91240B29-F687-4f45-9708-019B960494DF}">
-                  <a14:hiddenLine xmlns:a14="http://schemas.microsoft.com/office/drawing/2010/main" xmlns="" w="9525">
+                  <a14:hiddenLine xmlns="" xmlns:a14="http://schemas.microsoft.com/office/drawing/2010/main" w="9525">
                     <a:solidFill>
                       <a:srgbClr val="000000"/>
                     </a:solidFill>
@@ -10744,7 +10754,7 @@
               </a:ln>
               <a:extLst>
                 <a:ext uri="{91240B29-F687-4f45-9708-019B960494DF}">
-                  <a14:hiddenLine xmlns:a14="http://schemas.microsoft.com/office/drawing/2010/main" xmlns="" w="9525">
+                  <a14:hiddenLine xmlns="" xmlns:a14="http://schemas.microsoft.com/office/drawing/2010/main" w="9525">
                     <a:solidFill>
                       <a:srgbClr val="000000"/>
                     </a:solidFill>
@@ -10841,7 +10851,7 @@
               </a:ln>
               <a:extLst>
                 <a:ext uri="{91240B29-F687-4f45-9708-019B960494DF}">
-                  <a14:hiddenLine xmlns:a14="http://schemas.microsoft.com/office/drawing/2010/main" xmlns="" w="9525">
+                  <a14:hiddenLine xmlns="" xmlns:a14="http://schemas.microsoft.com/office/drawing/2010/main" w="9525">
                     <a:solidFill>
                       <a:srgbClr val="000000"/>
                     </a:solidFill>
@@ -10910,7 +10920,7 @@
               </a:ln>
               <a:extLst>
                 <a:ext uri="{91240B29-F687-4f45-9708-019B960494DF}">
-                  <a14:hiddenLine xmlns:a14="http://schemas.microsoft.com/office/drawing/2010/main" xmlns="" w="9525">
+                  <a14:hiddenLine xmlns="" xmlns:a14="http://schemas.microsoft.com/office/drawing/2010/main" w="9525">
                     <a:solidFill>
                       <a:srgbClr val="000000"/>
                     </a:solidFill>
@@ -11007,7 +11017,7 @@
               </a:ln>
               <a:extLst>
                 <a:ext uri="{91240B29-F687-4f45-9708-019B960494DF}">
-                  <a14:hiddenLine xmlns:a14="http://schemas.microsoft.com/office/drawing/2010/main" xmlns="" w="9525">
+                  <a14:hiddenLine xmlns="" xmlns:a14="http://schemas.microsoft.com/office/drawing/2010/main" w="9525">
                     <a:solidFill>
                       <a:srgbClr val="000000"/>
                     </a:solidFill>
@@ -11079,7 +11089,7 @@
               </a:ln>
               <a:extLst>
                 <a:ext uri="{91240B29-F687-4f45-9708-019B960494DF}">
-                  <a14:hiddenLine xmlns:a14="http://schemas.microsoft.com/office/drawing/2010/main" xmlns="" w="9525">
+                  <a14:hiddenLine xmlns="" xmlns:a14="http://schemas.microsoft.com/office/drawing/2010/main" w="9525">
                     <a:solidFill>
                       <a:srgbClr val="000000"/>
                     </a:solidFill>
@@ -11148,7 +11158,7 @@
               </a:ln>
               <a:extLst>
                 <a:ext uri="{91240B29-F687-4f45-9708-019B960494DF}">
-                  <a14:hiddenLine xmlns:a14="http://schemas.microsoft.com/office/drawing/2010/main" xmlns="" w="9525">
+                  <a14:hiddenLine xmlns="" xmlns:a14="http://schemas.microsoft.com/office/drawing/2010/main" w="9525">
                     <a:solidFill>
                       <a:srgbClr val="000000"/>
                     </a:solidFill>
@@ -11245,7 +11255,7 @@
               </a:ln>
               <a:extLst>
                 <a:ext uri="{91240B29-F687-4f45-9708-019B960494DF}">
-                  <a14:hiddenLine xmlns:a14="http://schemas.microsoft.com/office/drawing/2010/main" xmlns="" w="9525">
+                  <a14:hiddenLine xmlns="" xmlns:a14="http://schemas.microsoft.com/office/drawing/2010/main" w="9525">
                     <a:solidFill>
                       <a:srgbClr val="000000"/>
                     </a:solidFill>
@@ -11342,7 +11352,7 @@
               </a:ln>
               <a:extLst>
                 <a:ext uri="{91240B29-F687-4f45-9708-019B960494DF}">
-                  <a14:hiddenLine xmlns:a14="http://schemas.microsoft.com/office/drawing/2010/main" xmlns="" w="9525">
+                  <a14:hiddenLine xmlns="" xmlns:a14="http://schemas.microsoft.com/office/drawing/2010/main" w="9525">
                     <a:solidFill>
                       <a:srgbClr val="000000"/>
                     </a:solidFill>
@@ -11414,7 +11424,7 @@
               </a:ln>
               <a:extLst>
                 <a:ext uri="{91240B29-F687-4f45-9708-019B960494DF}">
-                  <a14:hiddenLine xmlns:a14="http://schemas.microsoft.com/office/drawing/2010/main" xmlns="" w="9525">
+                  <a14:hiddenLine xmlns="" xmlns:a14="http://schemas.microsoft.com/office/drawing/2010/main" w="9525">
                     <a:solidFill>
                       <a:srgbClr val="000000"/>
                     </a:solidFill>
@@ -11541,7 +11551,7 @@
               </a:ln>
               <a:extLst>
                 <a:ext uri="{91240B29-F687-4f45-9708-019B960494DF}">
-                  <a14:hiddenLine xmlns:a14="http://schemas.microsoft.com/office/drawing/2010/main" xmlns="" w="9525">
+                  <a14:hiddenLine xmlns="" xmlns:a14="http://schemas.microsoft.com/office/drawing/2010/main" w="9525">
                     <a:solidFill>
                       <a:srgbClr val="000000"/>
                     </a:solidFill>
@@ -11646,7 +11656,7 @@
               </a:ln>
               <a:extLst>
                 <a:ext uri="{91240B29-F687-4f45-9708-019B960494DF}">
-                  <a14:hiddenLine xmlns:a14="http://schemas.microsoft.com/office/drawing/2010/main" xmlns="" w="9525">
+                  <a14:hiddenLine xmlns="" xmlns:a14="http://schemas.microsoft.com/office/drawing/2010/main" w="9525">
                     <a:solidFill>
                       <a:srgbClr val="000000"/>
                     </a:solidFill>
@@ -11768,7 +11778,7 @@
               </a:ln>
               <a:extLst>
                 <a:ext uri="{91240B29-F687-4f45-9708-019B960494DF}">
-                  <a14:hiddenLine xmlns:a14="http://schemas.microsoft.com/office/drawing/2010/main" xmlns="" w="9525">
+                  <a14:hiddenLine xmlns="" xmlns:a14="http://schemas.microsoft.com/office/drawing/2010/main" w="9525">
                     <a:solidFill>
                       <a:srgbClr val="000000"/>
                     </a:solidFill>
@@ -11865,7 +11875,7 @@
               </a:ln>
               <a:extLst>
                 <a:ext uri="{91240B29-F687-4f45-9708-019B960494DF}">
-                  <a14:hiddenLine xmlns:a14="http://schemas.microsoft.com/office/drawing/2010/main" xmlns="" w="9525">
+                  <a14:hiddenLine xmlns="" xmlns:a14="http://schemas.microsoft.com/office/drawing/2010/main" w="9525">
                     <a:solidFill>
                       <a:srgbClr val="000000"/>
                     </a:solidFill>
@@ -11937,7 +11947,7 @@
               </a:ln>
               <a:extLst>
                 <a:ext uri="{91240B29-F687-4f45-9708-019B960494DF}">
-                  <a14:hiddenLine xmlns:a14="http://schemas.microsoft.com/office/drawing/2010/main" xmlns="" w="9525">
+                  <a14:hiddenLine xmlns="" xmlns:a14="http://schemas.microsoft.com/office/drawing/2010/main" w="9525">
                     <a:solidFill>
                       <a:srgbClr val="000000"/>
                     </a:solidFill>
@@ -12034,7 +12044,7 @@
               </a:ln>
               <a:extLst>
                 <a:ext uri="{91240B29-F687-4f45-9708-019B960494DF}">
-                  <a14:hiddenLine xmlns:a14="http://schemas.microsoft.com/office/drawing/2010/main" xmlns="" w="9525">
+                  <a14:hiddenLine xmlns="" xmlns:a14="http://schemas.microsoft.com/office/drawing/2010/main" w="9525">
                     <a:solidFill>
                       <a:srgbClr val="000000"/>
                     </a:solidFill>
@@ -12109,7 +12119,7 @@
               </a:ln>
               <a:extLst>
                 <a:ext uri="{91240B29-F687-4f45-9708-019B960494DF}">
-                  <a14:hiddenLine xmlns:a14="http://schemas.microsoft.com/office/drawing/2010/main" xmlns="" w="9525">
+                  <a14:hiddenLine xmlns="" xmlns:a14="http://schemas.microsoft.com/office/drawing/2010/main" w="9525">
                     <a:solidFill>
                       <a:srgbClr val="000000"/>
                     </a:solidFill>
@@ -12206,7 +12216,7 @@
               </a:ln>
               <a:extLst>
                 <a:ext uri="{91240B29-F687-4f45-9708-019B960494DF}">
-                  <a14:hiddenLine xmlns:a14="http://schemas.microsoft.com/office/drawing/2010/main" xmlns="" w="9525">
+                  <a14:hiddenLine xmlns="" xmlns:a14="http://schemas.microsoft.com/office/drawing/2010/main" w="9525">
                     <a:solidFill>
                       <a:srgbClr val="000000"/>
                     </a:solidFill>
@@ -12281,7 +12291,7 @@
               </a:ln>
               <a:extLst>
                 <a:ext uri="{91240B29-F687-4f45-9708-019B960494DF}">
-                  <a14:hiddenLine xmlns:a14="http://schemas.microsoft.com/office/drawing/2010/main" xmlns="" w="9525">
+                  <a14:hiddenLine xmlns="" xmlns:a14="http://schemas.microsoft.com/office/drawing/2010/main" w="9525">
                     <a:solidFill>
                       <a:srgbClr val="000000"/>
                     </a:solidFill>
@@ -12378,7 +12388,7 @@
               </a:ln>
               <a:extLst>
                 <a:ext uri="{91240B29-F687-4f45-9708-019B960494DF}">
-                  <a14:hiddenLine xmlns:a14="http://schemas.microsoft.com/office/drawing/2010/main" xmlns="" w="9525">
+                  <a14:hiddenLine xmlns="" xmlns:a14="http://schemas.microsoft.com/office/drawing/2010/main" w="9525">
                     <a:solidFill>
                       <a:srgbClr val="000000"/>
                     </a:solidFill>
@@ -12419,7 +12429,7 @@
               </a:ln>
               <a:extLst>
                 <a:ext uri="{91240B29-F687-4f45-9708-019B960494DF}">
-                  <a14:hiddenLine xmlns:a14="http://schemas.microsoft.com/office/drawing/2010/main" xmlns="" w="9525">
+                  <a14:hiddenLine xmlns="" xmlns:a14="http://schemas.microsoft.com/office/drawing/2010/main" w="9525">
                     <a:solidFill>
                       <a:srgbClr val="000000"/>
                     </a:solidFill>
@@ -12567,7 +12577,7 @@
             <a:fld id="{48A87A34-81AB-432B-8DAE-1953F412C126}" type="datetimeFigureOut">
               <a:rPr lang="en-US" dirty="0"/>
               <a:pPr/>
-              <a:t>3/13/26</a:t>
+              <a:t>3/19/26</a:t>
             </a:fld>
             <a:endParaRPr lang="en-US" dirty="0"/>
           </a:p>
@@ -12646,7 +12656,7 @@
             <a:fld id="{6D22F896-40B5-4ADD-8801-0D06FADFA095}" type="slidenum">
               <a:rPr lang="en-US" dirty="0"/>
               <a:pPr/>
-              <a:t>‹#›</a:t>
+              <a:t>‹nr.›</a:t>
             </a:fld>
             <a:endParaRPr lang="en-US" dirty="0"/>
           </a:p>
@@ -13063,6 +13073,1219 @@
   <p:cSld>
     <p:spTree>
       <p:nvGrpSpPr>
+        <p:cNvPr id="1" name="">
+          <a:extLst>
+            <a:ext uri="{FF2B5EF4-FFF2-40B4-BE49-F238E27FC236}">
+              <a16:creationId xmlns:a16="http://schemas.microsoft.com/office/drawing/2014/main" id="{EAB2FA9E-4962-990A-ED88-649AEAF55695}"/>
+            </a:ext>
+          </a:extLst>
+        </p:cNvPr>
+        <p:cNvGrpSpPr/>
+        <p:nvPr/>
+      </p:nvGrpSpPr>
+      <p:grpSpPr>
+        <a:xfrm>
+          <a:off x="0" y="0"/>
+          <a:ext cx="0" cy="0"/>
+          <a:chOff x="0" y="0"/>
+          <a:chExt cx="0" cy="0"/>
+        </a:xfrm>
+      </p:grpSpPr>
+      <p:pic>
+        <p:nvPicPr>
+          <p:cNvPr id="7" name="Afbeelding 6">
+            <a:extLst>
+              <a:ext uri="{FF2B5EF4-FFF2-40B4-BE49-F238E27FC236}">
+                <a16:creationId xmlns:a16="http://schemas.microsoft.com/office/drawing/2014/main" id="{F1A0D3DF-4CBA-5242-D7D3-7B9CF97AA125}"/>
+              </a:ext>
+            </a:extLst>
+          </p:cNvPr>
+          <p:cNvPicPr>
+            <a:picLocks noChangeAspect="1"/>
+          </p:cNvPicPr>
+          <p:nvPr/>
+        </p:nvPicPr>
+        <p:blipFill>
+          <a:blip r:embed="rId2"/>
+          <a:srcRect l="28493" r="29802"/>
+          <a:stretch>
+            <a:fillRect/>
+          </a:stretch>
+        </p:blipFill>
+        <p:spPr>
+          <a:xfrm>
+            <a:off x="5490732" y="1397000"/>
+            <a:ext cx="2261288" cy="4064000"/>
+          </a:xfrm>
+          <a:prstGeom prst="rect">
+            <a:avLst/>
+          </a:prstGeom>
+        </p:spPr>
+      </p:pic>
+      <p:sp>
+        <p:nvSpPr>
+          <p:cNvPr id="2" name="Title 1">
+            <a:extLst>
+              <a:ext uri="{FF2B5EF4-FFF2-40B4-BE49-F238E27FC236}">
+                <a16:creationId xmlns:a16="http://schemas.microsoft.com/office/drawing/2014/main" id="{A4A0FC96-9254-3C13-91B8-DF517BD785E8}"/>
+              </a:ext>
+            </a:extLst>
+          </p:cNvPr>
+          <p:cNvSpPr>
+            <a:spLocks noGrp="1"/>
+          </p:cNvSpPr>
+          <p:nvPr>
+            <p:ph type="ctrTitle"/>
+          </p:nvPr>
+        </p:nvSpPr>
+        <p:spPr>
+          <a:xfrm>
+            <a:off x="2890227" y="333632"/>
+            <a:ext cx="1978884" cy="860168"/>
+          </a:xfrm>
+        </p:spPr>
+        <p:txBody>
+          <a:bodyPr>
+            <a:normAutofit/>
+          </a:bodyPr>
+          <a:lstStyle/>
+          <a:p>
+            <a:r>
+              <a:rPr lang="nl-NL" sz="3200" dirty="0"/>
+              <a:t>ESP32S3</a:t>
+            </a:r>
+            <a:endParaRPr lang="en-NL" sz="3200" dirty="0"/>
+          </a:p>
+        </p:txBody>
+      </p:sp>
+      <p:sp>
+        <p:nvSpPr>
+          <p:cNvPr id="3" name="Subtitle 2">
+            <a:extLst>
+              <a:ext uri="{FF2B5EF4-FFF2-40B4-BE49-F238E27FC236}">
+                <a16:creationId xmlns:a16="http://schemas.microsoft.com/office/drawing/2014/main" id="{B6B23F82-27A7-5D8A-19FD-DC33E412241A}"/>
+              </a:ext>
+            </a:extLst>
+          </p:cNvPr>
+          <p:cNvSpPr>
+            <a:spLocks noGrp="1"/>
+          </p:cNvSpPr>
+          <p:nvPr>
+            <p:ph type="subTitle" idx="1"/>
+          </p:nvPr>
+        </p:nvSpPr>
+        <p:spPr/>
+        <p:txBody>
+          <a:bodyPr/>
+          <a:lstStyle/>
+          <a:p>
+            <a:r>
+              <a:rPr lang="en-NL" dirty="0"/>
+              <a:t>Touchytouch</a:t>
+            </a:r>
+          </a:p>
+          <a:p>
+            <a:r>
+              <a:rPr lang="en-NL" dirty="0"/>
+              <a:t>AMY</a:t>
+            </a:r>
+          </a:p>
+          <a:p>
+            <a:r>
+              <a:rPr lang="en-NL" dirty="0"/>
+              <a:t>Mozzi</a:t>
+            </a:r>
+          </a:p>
+        </p:txBody>
+      </p:sp>
+      <p:pic>
+        <p:nvPicPr>
+          <p:cNvPr id="5" name="Afbeelding 4">
+            <a:extLst>
+              <a:ext uri="{FF2B5EF4-FFF2-40B4-BE49-F238E27FC236}">
+                <a16:creationId xmlns:a16="http://schemas.microsoft.com/office/drawing/2014/main" id="{6A2A6E55-3F51-84E6-BFEC-788129BF0F39}"/>
+              </a:ext>
+            </a:extLst>
+          </p:cNvPr>
+          <p:cNvPicPr>
+            <a:picLocks noChangeAspect="1"/>
+          </p:cNvPicPr>
+          <p:nvPr/>
+        </p:nvPicPr>
+        <p:blipFill>
+          <a:blip r:embed="rId3"/>
+          <a:srcRect l="20974" r="23384"/>
+          <a:stretch>
+            <a:fillRect/>
+          </a:stretch>
+        </p:blipFill>
+        <p:spPr>
+          <a:xfrm>
+            <a:off x="2890227" y="1397000"/>
+            <a:ext cx="2261288" cy="4064000"/>
+          </a:xfrm>
+          <a:prstGeom prst="rect">
+            <a:avLst/>
+          </a:prstGeom>
+        </p:spPr>
+      </p:pic>
+      <p:pic>
+        <p:nvPicPr>
+          <p:cNvPr id="9" name="Afbeelding 8">
+            <a:extLst>
+              <a:ext uri="{FF2B5EF4-FFF2-40B4-BE49-F238E27FC236}">
+                <a16:creationId xmlns:a16="http://schemas.microsoft.com/office/drawing/2014/main" id="{6E04856B-E22E-FAB2-C8E2-10D2CD37BCDB}"/>
+              </a:ext>
+            </a:extLst>
+          </p:cNvPr>
+          <p:cNvPicPr>
+            <a:picLocks noChangeAspect="1"/>
+          </p:cNvPicPr>
+          <p:nvPr/>
+        </p:nvPicPr>
+        <p:blipFill>
+          <a:blip r:embed="rId4"/>
+          <a:stretch>
+            <a:fillRect/>
+          </a:stretch>
+        </p:blipFill>
+        <p:spPr>
+          <a:xfrm>
+            <a:off x="6917037" y="2839404"/>
+            <a:ext cx="4064000" cy="1179192"/>
+          </a:xfrm>
+          <a:prstGeom prst="rect">
+            <a:avLst/>
+          </a:prstGeom>
+          <a:scene3d>
+            <a:camera prst="orthographicFront">
+              <a:rot lat="0" lon="0" rev="16200000"/>
+            </a:camera>
+            <a:lightRig rig="threePt" dir="t"/>
+          </a:scene3d>
+        </p:spPr>
+      </p:pic>
+      <p:sp>
+        <p:nvSpPr>
+          <p:cNvPr id="10" name="Title 1">
+            <a:extLst>
+              <a:ext uri="{FF2B5EF4-FFF2-40B4-BE49-F238E27FC236}">
+                <a16:creationId xmlns:a16="http://schemas.microsoft.com/office/drawing/2014/main" id="{0AC616F8-2944-972D-959B-F498CA0435EE}"/>
+              </a:ext>
+            </a:extLst>
+          </p:cNvPr>
+          <p:cNvSpPr txBox="1">
+            <a:spLocks/>
+          </p:cNvSpPr>
+          <p:nvPr/>
+        </p:nvSpPr>
+        <p:spPr>
+          <a:xfrm>
+            <a:off x="5490732" y="333632"/>
+            <a:ext cx="1978884" cy="860168"/>
+          </a:xfrm>
+          <a:prstGeom prst="rect">
+            <a:avLst/>
+          </a:prstGeom>
+        </p:spPr>
+        <p:txBody>
+          <a:bodyPr vert="horz" lIns="91440" tIns="45720" rIns="91440" bIns="45720" rtlCol="0" anchor="b">
+            <a:normAutofit/>
+          </a:bodyPr>
+          <a:lstStyle>
+            <a:lvl1pPr algn="l" defTabSz="914400" rtl="0" eaLnBrk="1" latinLnBrk="0" hangingPunct="1">
+              <a:lnSpc>
+                <a:spcPct val="90000"/>
+              </a:lnSpc>
+              <a:spcBef>
+                <a:spcPct val="0"/>
+              </a:spcBef>
+              <a:buNone/>
+              <a:defRPr sz="4800" kern="1200" cap="all" baseline="0">
+                <a:solidFill>
+                  <a:schemeClr val="tx1"/>
+                </a:solidFill>
+                <a:latin typeface="+mj-lt"/>
+                <a:ea typeface="+mj-ea"/>
+                <a:cs typeface="+mj-cs"/>
+              </a:defRPr>
+            </a:lvl1pPr>
+          </a:lstStyle>
+          <a:p>
+            <a:r>
+              <a:rPr lang="nl-NL" sz="3200" dirty="0"/>
+              <a:t>RP2350</a:t>
+            </a:r>
+            <a:endParaRPr lang="en-NL" sz="3200" dirty="0"/>
+          </a:p>
+        </p:txBody>
+      </p:sp>
+      <p:sp>
+        <p:nvSpPr>
+          <p:cNvPr id="11" name="Title 1">
+            <a:extLst>
+              <a:ext uri="{FF2B5EF4-FFF2-40B4-BE49-F238E27FC236}">
+                <a16:creationId xmlns:a16="http://schemas.microsoft.com/office/drawing/2014/main" id="{C0CCD365-DE3F-F735-695A-D8EE8409B790}"/>
+              </a:ext>
+            </a:extLst>
+          </p:cNvPr>
+          <p:cNvSpPr txBox="1">
+            <a:spLocks/>
+          </p:cNvSpPr>
+          <p:nvPr/>
+        </p:nvSpPr>
+        <p:spPr>
+          <a:xfrm>
+            <a:off x="8312331" y="333632"/>
+            <a:ext cx="1978884" cy="860168"/>
+          </a:xfrm>
+          <a:prstGeom prst="rect">
+            <a:avLst/>
+          </a:prstGeom>
+        </p:spPr>
+        <p:txBody>
+          <a:bodyPr vert="horz" lIns="91440" tIns="45720" rIns="91440" bIns="45720" rtlCol="0" anchor="b">
+            <a:normAutofit fontScale="85000" lnSpcReduction="10000"/>
+          </a:bodyPr>
+          <a:lstStyle>
+            <a:lvl1pPr algn="l" defTabSz="914400" rtl="0" eaLnBrk="1" latinLnBrk="0" hangingPunct="1">
+              <a:lnSpc>
+                <a:spcPct val="90000"/>
+              </a:lnSpc>
+              <a:spcBef>
+                <a:spcPct val="0"/>
+              </a:spcBef>
+              <a:buNone/>
+              <a:defRPr sz="4800" kern="1200" cap="all" baseline="0">
+                <a:solidFill>
+                  <a:schemeClr val="tx1"/>
+                </a:solidFill>
+                <a:latin typeface="+mj-lt"/>
+                <a:ea typeface="+mj-ea"/>
+                <a:cs typeface="+mj-cs"/>
+              </a:defRPr>
+            </a:lvl1pPr>
+          </a:lstStyle>
+          <a:p>
+            <a:r>
+              <a:rPr lang="nl-NL" sz="3200" dirty="0"/>
+              <a:t>ARM Cortex-M7</a:t>
+            </a:r>
+            <a:endParaRPr lang="en-NL" sz="3200" dirty="0"/>
+          </a:p>
+        </p:txBody>
+      </p:sp>
+    </p:spTree>
+    <p:extLst>
+      <p:ext uri="{BB962C8B-B14F-4D97-AF65-F5344CB8AC3E}">
+        <p14:creationId xmlns:p14="http://schemas.microsoft.com/office/powerpoint/2010/main" val="1989989669"/>
+      </p:ext>
+    </p:extLst>
+  </p:cSld>
+  <p:clrMapOvr>
+    <a:masterClrMapping/>
+  </p:clrMapOvr>
+</p:sld>
+</file>
+
+<file path=ppt/slides/slide3.xml><?xml version="1.0" encoding="utf-8"?>
+<p:sld xmlns:a="http://schemas.openxmlformats.org/drawingml/2006/main" xmlns:r="http://schemas.openxmlformats.org/officeDocument/2006/relationships" xmlns:p="http://schemas.openxmlformats.org/presentationml/2006/main">
+  <p:cSld>
+    <p:spTree>
+      <p:nvGrpSpPr>
+        <p:cNvPr id="1" name="">
+          <a:extLst>
+            <a:ext uri="{FF2B5EF4-FFF2-40B4-BE49-F238E27FC236}">
+              <a16:creationId xmlns:a16="http://schemas.microsoft.com/office/drawing/2014/main" id="{C4A66AC5-4193-A402-3FE7-1A61FCA7C5CC}"/>
+            </a:ext>
+          </a:extLst>
+        </p:cNvPr>
+        <p:cNvGrpSpPr/>
+        <p:nvPr/>
+      </p:nvGrpSpPr>
+      <p:grpSpPr>
+        <a:xfrm>
+          <a:off x="0" y="0"/>
+          <a:ext cx="0" cy="0"/>
+          <a:chOff x="0" y="0"/>
+          <a:chExt cx="0" cy="0"/>
+        </a:xfrm>
+      </p:grpSpPr>
+      <p:sp>
+        <p:nvSpPr>
+          <p:cNvPr id="2" name="Title 1">
+            <a:extLst>
+              <a:ext uri="{FF2B5EF4-FFF2-40B4-BE49-F238E27FC236}">
+                <a16:creationId xmlns:a16="http://schemas.microsoft.com/office/drawing/2014/main" id="{3771C5B5-1335-3B7B-94AC-818B5E9DC8FD}"/>
+              </a:ext>
+            </a:extLst>
+          </p:cNvPr>
+          <p:cNvSpPr>
+            <a:spLocks noGrp="1"/>
+          </p:cNvSpPr>
+          <p:nvPr>
+            <p:ph type="ctrTitle"/>
+          </p:nvPr>
+        </p:nvSpPr>
+        <p:spPr>
+          <a:xfrm>
+            <a:off x="2556046" y="146179"/>
+            <a:ext cx="8791575" cy="965929"/>
+          </a:xfrm>
+        </p:spPr>
+        <p:txBody>
+          <a:bodyPr>
+            <a:normAutofit/>
+          </a:bodyPr>
+          <a:lstStyle/>
+          <a:p>
+            <a:r>
+              <a:rPr lang="nl-NL" sz="3200" dirty="0"/>
+              <a:t>AMY SYNTH Library</a:t>
+            </a:r>
+            <a:endParaRPr lang="en-NL" sz="3200" dirty="0"/>
+          </a:p>
+        </p:txBody>
+      </p:sp>
+      <p:sp>
+        <p:nvSpPr>
+          <p:cNvPr id="3" name="Subtitle 2">
+            <a:extLst>
+              <a:ext uri="{FF2B5EF4-FFF2-40B4-BE49-F238E27FC236}">
+                <a16:creationId xmlns:a16="http://schemas.microsoft.com/office/drawing/2014/main" id="{12ADD0AF-B511-B8DF-9F6D-7ABFBAC0E28E}"/>
+              </a:ext>
+            </a:extLst>
+          </p:cNvPr>
+          <p:cNvSpPr>
+            <a:spLocks noGrp="1"/>
+          </p:cNvSpPr>
+          <p:nvPr>
+            <p:ph type="subTitle" idx="1"/>
+          </p:nvPr>
+        </p:nvSpPr>
+        <p:spPr>
+          <a:xfrm>
+            <a:off x="2556046" y="1112107"/>
+            <a:ext cx="8791575" cy="1519881"/>
+          </a:xfrm>
+        </p:spPr>
+        <p:txBody>
+          <a:bodyPr>
+            <a:normAutofit/>
+          </a:bodyPr>
+          <a:lstStyle/>
+          <a:p>
+            <a:r>
+              <a:rPr lang="nl-NL" dirty="0">
+                <a:hlinkClick r:id="rId2"/>
+              </a:rPr>
+              <a:t>https://github.com/shorepine/amy</a:t>
+            </a:r>
+          </a:p>
+          <a:p>
+            <a:endParaRPr lang="nl-NL" dirty="0">
+              <a:hlinkClick r:id="rId2"/>
+            </a:endParaRPr>
+          </a:p>
+          <a:p>
+            <a:r>
+              <a:rPr lang="nl-NL" dirty="0">
+                <a:hlinkClick r:id="rId2"/>
+              </a:rPr>
+              <a:t>https://www.amyboard.com/editor</a:t>
+            </a:r>
+            <a:endParaRPr lang="nl-NL" dirty="0"/>
+          </a:p>
+          <a:p>
+            <a:endParaRPr lang="en-NL" dirty="0"/>
+          </a:p>
+        </p:txBody>
+      </p:sp>
+      <p:pic>
+        <p:nvPicPr>
+          <p:cNvPr id="5" name="Afbeelding 4">
+            <a:extLst>
+              <a:ext uri="{FF2B5EF4-FFF2-40B4-BE49-F238E27FC236}">
+                <a16:creationId xmlns:a16="http://schemas.microsoft.com/office/drawing/2014/main" id="{6E1D7D54-A68A-731E-35CA-1F0B7D0D1991}"/>
+              </a:ext>
+            </a:extLst>
+          </p:cNvPr>
+          <p:cNvPicPr>
+            <a:picLocks noChangeAspect="1"/>
+          </p:cNvPicPr>
+          <p:nvPr/>
+        </p:nvPicPr>
+        <p:blipFill>
+          <a:blip r:embed="rId3"/>
+          <a:stretch>
+            <a:fillRect/>
+          </a:stretch>
+        </p:blipFill>
+        <p:spPr>
+          <a:xfrm>
+            <a:off x="6096000" y="2770015"/>
+            <a:ext cx="3276342" cy="2457257"/>
+          </a:xfrm>
+          <a:prstGeom prst="rect">
+            <a:avLst/>
+          </a:prstGeom>
+        </p:spPr>
+      </p:pic>
+      <p:pic>
+        <p:nvPicPr>
+          <p:cNvPr id="9" name="Afbeelding 8">
+            <a:extLst>
+              <a:ext uri="{FF2B5EF4-FFF2-40B4-BE49-F238E27FC236}">
+                <a16:creationId xmlns:a16="http://schemas.microsoft.com/office/drawing/2014/main" id="{24780591-D9EE-0964-4B08-92A88AE77CCA}"/>
+              </a:ext>
+            </a:extLst>
+          </p:cNvPr>
+          <p:cNvPicPr>
+            <a:picLocks noChangeAspect="1"/>
+          </p:cNvPicPr>
+          <p:nvPr/>
+        </p:nvPicPr>
+        <p:blipFill>
+          <a:blip r:embed="rId4"/>
+          <a:stretch>
+            <a:fillRect/>
+          </a:stretch>
+        </p:blipFill>
+        <p:spPr>
+          <a:xfrm>
+            <a:off x="2556046" y="2770015"/>
+            <a:ext cx="3247510" cy="2435633"/>
+          </a:xfrm>
+          <a:prstGeom prst="rect">
+            <a:avLst/>
+          </a:prstGeom>
+        </p:spPr>
+      </p:pic>
+    </p:spTree>
+    <p:extLst>
+      <p:ext uri="{BB962C8B-B14F-4D97-AF65-F5344CB8AC3E}">
+        <p14:creationId xmlns:p14="http://schemas.microsoft.com/office/powerpoint/2010/main" val="1835788855"/>
+      </p:ext>
+    </p:extLst>
+  </p:cSld>
+  <p:clrMapOvr>
+    <a:masterClrMapping/>
+  </p:clrMapOvr>
+</p:sld>
+</file>
+
+<file path=ppt/slides/slide4.xml><?xml version="1.0" encoding="utf-8"?>
+<p:sld xmlns:a="http://schemas.openxmlformats.org/drawingml/2006/main" xmlns:r="http://schemas.openxmlformats.org/officeDocument/2006/relationships" xmlns:p="http://schemas.openxmlformats.org/presentationml/2006/main">
+  <p:cSld>
+    <p:spTree>
+      <p:nvGrpSpPr>
+        <p:cNvPr id="1" name="">
+          <a:extLst>
+            <a:ext uri="{FF2B5EF4-FFF2-40B4-BE49-F238E27FC236}">
+              <a16:creationId xmlns:a16="http://schemas.microsoft.com/office/drawing/2014/main" id="{3F4B83BA-E1DB-ADDB-F594-63A762DD4675}"/>
+            </a:ext>
+          </a:extLst>
+        </p:cNvPr>
+        <p:cNvGrpSpPr/>
+        <p:nvPr/>
+      </p:nvGrpSpPr>
+      <p:grpSpPr>
+        <a:xfrm>
+          <a:off x="0" y="0"/>
+          <a:ext cx="0" cy="0"/>
+          <a:chOff x="0" y="0"/>
+          <a:chExt cx="0" cy="0"/>
+        </a:xfrm>
+      </p:grpSpPr>
+      <p:sp>
+        <p:nvSpPr>
+          <p:cNvPr id="2" name="Title 1">
+            <a:extLst>
+              <a:ext uri="{FF2B5EF4-FFF2-40B4-BE49-F238E27FC236}">
+                <a16:creationId xmlns:a16="http://schemas.microsoft.com/office/drawing/2014/main" id="{74BA9555-BC5A-09DD-EB48-A230BBDB7B33}"/>
+              </a:ext>
+            </a:extLst>
+          </p:cNvPr>
+          <p:cNvSpPr>
+            <a:spLocks noGrp="1"/>
+          </p:cNvSpPr>
+          <p:nvPr>
+            <p:ph type="ctrTitle"/>
+          </p:nvPr>
+        </p:nvSpPr>
+        <p:spPr>
+          <a:xfrm>
+            <a:off x="2556046" y="146179"/>
+            <a:ext cx="8791575" cy="965929"/>
+          </a:xfrm>
+        </p:spPr>
+        <p:txBody>
+          <a:bodyPr>
+            <a:normAutofit/>
+          </a:bodyPr>
+          <a:lstStyle/>
+          <a:p>
+            <a:r>
+              <a:rPr lang="nl-NL" sz="3200" dirty="0"/>
+              <a:t>AMY SYNTH Library</a:t>
+            </a:r>
+            <a:endParaRPr lang="en-NL" sz="3200" dirty="0"/>
+          </a:p>
+        </p:txBody>
+      </p:sp>
+      <p:sp>
+        <p:nvSpPr>
+          <p:cNvPr id="3" name="Subtitle 2">
+            <a:extLst>
+              <a:ext uri="{FF2B5EF4-FFF2-40B4-BE49-F238E27FC236}">
+                <a16:creationId xmlns:a16="http://schemas.microsoft.com/office/drawing/2014/main" id="{71894756-DCC5-CC82-7207-9AA5FD356BCE}"/>
+              </a:ext>
+            </a:extLst>
+          </p:cNvPr>
+          <p:cNvSpPr>
+            <a:spLocks noGrp="1"/>
+          </p:cNvSpPr>
+          <p:nvPr>
+            <p:ph type="subTitle" idx="1"/>
+          </p:nvPr>
+        </p:nvSpPr>
+        <p:spPr>
+          <a:xfrm>
+            <a:off x="2556046" y="1112108"/>
+            <a:ext cx="8791575" cy="691978"/>
+          </a:xfrm>
+        </p:spPr>
+        <p:txBody>
+          <a:bodyPr/>
+          <a:lstStyle/>
+          <a:p>
+            <a:r>
+              <a:rPr lang="nl-NL" dirty="0">
+                <a:hlinkClick r:id="rId2"/>
+              </a:rPr>
+              <a:t>https://github.com/todbot/pico_test_synth</a:t>
+            </a:r>
+            <a:endParaRPr lang="nl-NL" dirty="0"/>
+          </a:p>
+          <a:p>
+            <a:endParaRPr lang="en-NL" dirty="0"/>
+          </a:p>
+        </p:txBody>
+      </p:sp>
+      <p:pic>
+        <p:nvPicPr>
+          <p:cNvPr id="4" name="Afbeelding 3">
+            <a:extLst>
+              <a:ext uri="{FF2B5EF4-FFF2-40B4-BE49-F238E27FC236}">
+                <a16:creationId xmlns:a16="http://schemas.microsoft.com/office/drawing/2014/main" id="{7B896BD9-5F87-0FFF-C2EA-F4B264B1B6E2}"/>
+              </a:ext>
+            </a:extLst>
+          </p:cNvPr>
+          <p:cNvPicPr>
+            <a:picLocks noChangeAspect="1"/>
+          </p:cNvPicPr>
+          <p:nvPr/>
+        </p:nvPicPr>
+        <p:blipFill>
+          <a:blip r:embed="rId3"/>
+          <a:stretch>
+            <a:fillRect/>
+          </a:stretch>
+        </p:blipFill>
+        <p:spPr>
+          <a:xfrm>
+            <a:off x="2556046" y="1804086"/>
+            <a:ext cx="6019543" cy="4514657"/>
+          </a:xfrm>
+          <a:prstGeom prst="rect">
+            <a:avLst/>
+          </a:prstGeom>
+        </p:spPr>
+      </p:pic>
+    </p:spTree>
+    <p:extLst>
+      <p:ext uri="{BB962C8B-B14F-4D97-AF65-F5344CB8AC3E}">
+        <p14:creationId xmlns:p14="http://schemas.microsoft.com/office/powerpoint/2010/main" val="2505531749"/>
+      </p:ext>
+    </p:extLst>
+  </p:cSld>
+  <p:clrMapOvr>
+    <a:masterClrMapping/>
+  </p:clrMapOvr>
+</p:sld>
+</file>
+
+<file path=ppt/slides/slide5.xml><?xml version="1.0" encoding="utf-8"?>
+<p:sld xmlns:a="http://schemas.openxmlformats.org/drawingml/2006/main" xmlns:r="http://schemas.openxmlformats.org/officeDocument/2006/relationships" xmlns:p="http://schemas.openxmlformats.org/presentationml/2006/main">
+  <p:cSld>
+    <p:spTree>
+      <p:nvGrpSpPr>
+        <p:cNvPr id="1" name="">
+          <a:extLst>
+            <a:ext uri="{FF2B5EF4-FFF2-40B4-BE49-F238E27FC236}">
+              <a16:creationId xmlns:a16="http://schemas.microsoft.com/office/drawing/2014/main" id="{A83972F7-7A28-A701-50D9-E2280523F202}"/>
+            </a:ext>
+          </a:extLst>
+        </p:cNvPr>
+        <p:cNvGrpSpPr/>
+        <p:nvPr/>
+      </p:nvGrpSpPr>
+      <p:grpSpPr>
+        <a:xfrm>
+          <a:off x="0" y="0"/>
+          <a:ext cx="0" cy="0"/>
+          <a:chOff x="0" y="0"/>
+          <a:chExt cx="0" cy="0"/>
+        </a:xfrm>
+      </p:grpSpPr>
+      <p:sp>
+        <p:nvSpPr>
+          <p:cNvPr id="2" name="Title 1">
+            <a:extLst>
+              <a:ext uri="{FF2B5EF4-FFF2-40B4-BE49-F238E27FC236}">
+                <a16:creationId xmlns:a16="http://schemas.microsoft.com/office/drawing/2014/main" id="{5F170613-28FB-EC00-C5C9-EE466B376B96}"/>
+              </a:ext>
+            </a:extLst>
+          </p:cNvPr>
+          <p:cNvSpPr>
+            <a:spLocks noGrp="1"/>
+          </p:cNvSpPr>
+          <p:nvPr>
+            <p:ph type="ctrTitle"/>
+          </p:nvPr>
+        </p:nvSpPr>
+        <p:spPr>
+          <a:xfrm>
+            <a:off x="2568402" y="393314"/>
+            <a:ext cx="8791575" cy="965929"/>
+          </a:xfrm>
+        </p:spPr>
+        <p:txBody>
+          <a:bodyPr>
+            <a:normAutofit/>
+          </a:bodyPr>
+          <a:lstStyle/>
+          <a:p>
+            <a:r>
+              <a:rPr lang="nl-NL" sz="3200" dirty="0" err="1"/>
+              <a:t>EuroPI</a:t>
+            </a:r>
+            <a:endParaRPr lang="en-NL" sz="3200" dirty="0"/>
+          </a:p>
+        </p:txBody>
+      </p:sp>
+      <p:sp>
+        <p:nvSpPr>
+          <p:cNvPr id="3" name="Subtitle 2">
+            <a:extLst>
+              <a:ext uri="{FF2B5EF4-FFF2-40B4-BE49-F238E27FC236}">
+                <a16:creationId xmlns:a16="http://schemas.microsoft.com/office/drawing/2014/main" id="{CE89E879-3565-FAD9-D2FF-4E3DA6E4CB55}"/>
+              </a:ext>
+            </a:extLst>
+          </p:cNvPr>
+          <p:cNvSpPr>
+            <a:spLocks noGrp="1"/>
+          </p:cNvSpPr>
+          <p:nvPr>
+            <p:ph type="subTitle" idx="1"/>
+          </p:nvPr>
+        </p:nvSpPr>
+        <p:spPr>
+          <a:xfrm>
+            <a:off x="2568402" y="1359243"/>
+            <a:ext cx="8791575" cy="691978"/>
+          </a:xfrm>
+        </p:spPr>
+        <p:txBody>
+          <a:bodyPr/>
+          <a:lstStyle/>
+          <a:p>
+            <a:r>
+              <a:rPr lang="nl-NL" dirty="0" err="1"/>
+              <a:t>https</a:t>
+            </a:r>
+            <a:r>
+              <a:rPr lang="nl-NL" dirty="0"/>
+              <a:t>://</a:t>
+            </a:r>
+            <a:r>
+              <a:rPr lang="nl-NL" dirty="0" err="1"/>
+              <a:t>github.com</a:t>
+            </a:r>
+            <a:r>
+              <a:rPr lang="nl-NL" dirty="0"/>
+              <a:t>/Allen-</a:t>
+            </a:r>
+            <a:r>
+              <a:rPr lang="nl-NL" dirty="0" err="1"/>
+              <a:t>Synthesis</a:t>
+            </a:r>
+            <a:r>
+              <a:rPr lang="nl-NL" dirty="0"/>
+              <a:t>/</a:t>
+            </a:r>
+            <a:r>
+              <a:rPr lang="nl-NL" dirty="0" err="1"/>
+              <a:t>EuroPi</a:t>
+            </a:r>
+            <a:endParaRPr lang="en-NL" dirty="0"/>
+          </a:p>
+        </p:txBody>
+      </p:sp>
+      <p:pic>
+        <p:nvPicPr>
+          <p:cNvPr id="8" name="Afbeelding 7">
+            <a:extLst>
+              <a:ext uri="{FF2B5EF4-FFF2-40B4-BE49-F238E27FC236}">
+                <a16:creationId xmlns:a16="http://schemas.microsoft.com/office/drawing/2014/main" id="{66AE0F35-1181-BC4E-18B7-56C29C1FBE99}"/>
+              </a:ext>
+            </a:extLst>
+          </p:cNvPr>
+          <p:cNvPicPr>
+            <a:picLocks noChangeAspect="1"/>
+          </p:cNvPicPr>
+          <p:nvPr/>
+        </p:nvPicPr>
+        <p:blipFill>
+          <a:blip r:embed="rId2"/>
+          <a:stretch>
+            <a:fillRect/>
+          </a:stretch>
+        </p:blipFill>
+        <p:spPr>
+          <a:xfrm>
+            <a:off x="2671144" y="1828800"/>
+            <a:ext cx="2720905" cy="4077730"/>
+          </a:xfrm>
+          <a:prstGeom prst="rect">
+            <a:avLst/>
+          </a:prstGeom>
+        </p:spPr>
+      </p:pic>
+      <p:pic>
+        <p:nvPicPr>
+          <p:cNvPr id="11" name="Afbeelding 10">
+            <a:extLst>
+              <a:ext uri="{FF2B5EF4-FFF2-40B4-BE49-F238E27FC236}">
+                <a16:creationId xmlns:a16="http://schemas.microsoft.com/office/drawing/2014/main" id="{7C12890A-1A31-C0AB-BD9D-9EE193DCE21E}"/>
+              </a:ext>
+            </a:extLst>
+          </p:cNvPr>
+          <p:cNvPicPr>
+            <a:picLocks noChangeAspect="1"/>
+          </p:cNvPicPr>
+          <p:nvPr/>
+        </p:nvPicPr>
+        <p:blipFill>
+          <a:blip r:embed="rId3"/>
+          <a:stretch>
+            <a:fillRect/>
+          </a:stretch>
+        </p:blipFill>
+        <p:spPr>
+          <a:xfrm>
+            <a:off x="5494790" y="1828800"/>
+            <a:ext cx="3167295" cy="4092528"/>
+          </a:xfrm>
+          <a:prstGeom prst="rect">
+            <a:avLst/>
+          </a:prstGeom>
+        </p:spPr>
+      </p:pic>
+    </p:spTree>
+    <p:extLst>
+      <p:ext uri="{BB962C8B-B14F-4D97-AF65-F5344CB8AC3E}">
+        <p14:creationId xmlns:p14="http://schemas.microsoft.com/office/powerpoint/2010/main" val="3726135976"/>
+      </p:ext>
+    </p:extLst>
+  </p:cSld>
+  <p:clrMapOvr>
+    <a:masterClrMapping/>
+  </p:clrMapOvr>
+</p:sld>
+</file>
+
+<file path=ppt/slides/slide6.xml><?xml version="1.0" encoding="utf-8"?>
+<p:sld xmlns:a="http://schemas.openxmlformats.org/drawingml/2006/main" xmlns:r="http://schemas.openxmlformats.org/officeDocument/2006/relationships" xmlns:p="http://schemas.openxmlformats.org/presentationml/2006/main">
+  <p:cSld>
+    <p:spTree>
+      <p:nvGrpSpPr>
+        <p:cNvPr id="1" name="">
+          <a:extLst>
+            <a:ext uri="{FF2B5EF4-FFF2-40B4-BE49-F238E27FC236}">
+              <a16:creationId xmlns:a16="http://schemas.microsoft.com/office/drawing/2014/main" id="{30F82D2F-C467-69BA-9C4B-7A55B4FFFCA8}"/>
+            </a:ext>
+          </a:extLst>
+        </p:cNvPr>
+        <p:cNvGrpSpPr/>
+        <p:nvPr/>
+      </p:nvGrpSpPr>
+      <p:grpSpPr>
+        <a:xfrm>
+          <a:off x="0" y="0"/>
+          <a:ext cx="0" cy="0"/>
+          <a:chOff x="0" y="0"/>
+          <a:chExt cx="0" cy="0"/>
+        </a:xfrm>
+      </p:grpSpPr>
+      <p:sp>
+        <p:nvSpPr>
+          <p:cNvPr id="2" name="Title 1">
+            <a:extLst>
+              <a:ext uri="{FF2B5EF4-FFF2-40B4-BE49-F238E27FC236}">
+                <a16:creationId xmlns:a16="http://schemas.microsoft.com/office/drawing/2014/main" id="{0E3C0927-F0B5-488F-19C1-537AC2778B38}"/>
+              </a:ext>
+            </a:extLst>
+          </p:cNvPr>
+          <p:cNvSpPr>
+            <a:spLocks noGrp="1"/>
+          </p:cNvSpPr>
+          <p:nvPr>
+            <p:ph type="ctrTitle"/>
+          </p:nvPr>
+        </p:nvSpPr>
+        <p:spPr>
+          <a:xfrm>
+            <a:off x="2534293" y="47368"/>
+            <a:ext cx="8791575" cy="891788"/>
+          </a:xfrm>
+        </p:spPr>
+        <p:txBody>
+          <a:bodyPr>
+            <a:normAutofit/>
+          </a:bodyPr>
+          <a:lstStyle/>
+          <a:p>
+            <a:r>
+              <a:rPr lang="nl-NL" sz="3200" dirty="0" err="1"/>
+              <a:t>Hagiwo</a:t>
+            </a:r>
+            <a:r>
+              <a:rPr lang="nl-NL" sz="3200" dirty="0"/>
+              <a:t> MOD2</a:t>
+            </a:r>
+            <a:r>
+              <a:rPr lang="en-NL" sz="3200"/>
+              <a:t> </a:t>
+            </a:r>
+            <a:endParaRPr lang="en-NL" sz="3200" dirty="0"/>
+          </a:p>
+        </p:txBody>
+      </p:sp>
+      <p:sp>
+        <p:nvSpPr>
+          <p:cNvPr id="3" name="Subtitle 2">
+            <a:extLst>
+              <a:ext uri="{FF2B5EF4-FFF2-40B4-BE49-F238E27FC236}">
+                <a16:creationId xmlns:a16="http://schemas.microsoft.com/office/drawing/2014/main" id="{15471421-FF62-8589-6DAA-AD9389B70498}"/>
+              </a:ext>
+            </a:extLst>
+          </p:cNvPr>
+          <p:cNvSpPr>
+            <a:spLocks noGrp="1"/>
+          </p:cNvSpPr>
+          <p:nvPr>
+            <p:ph type="subTitle" idx="1"/>
+          </p:nvPr>
+        </p:nvSpPr>
+        <p:spPr>
+          <a:xfrm>
+            <a:off x="2534292" y="939156"/>
+            <a:ext cx="8791575" cy="1655762"/>
+          </a:xfrm>
+        </p:spPr>
+        <p:txBody>
+          <a:bodyPr/>
+          <a:lstStyle/>
+          <a:p>
+            <a:r>
+              <a:rPr lang="nl-NL" dirty="0" err="1"/>
+              <a:t>https</a:t>
+            </a:r>
+            <a:r>
+              <a:rPr lang="nl-NL" dirty="0"/>
+              <a:t>://</a:t>
+            </a:r>
+            <a:r>
+              <a:rPr lang="nl-NL" dirty="0" err="1"/>
+              <a:t>note.com</a:t>
+            </a:r>
+            <a:r>
+              <a:rPr lang="nl-NL" dirty="0"/>
+              <a:t>/</a:t>
+            </a:r>
+            <a:r>
+              <a:rPr lang="nl-NL" dirty="0" err="1"/>
+              <a:t>solder_state</a:t>
+            </a:r>
+            <a:r>
+              <a:rPr lang="nl-NL" dirty="0"/>
+              <a:t>/n/nce8f7defcf98</a:t>
+            </a:r>
+            <a:endParaRPr lang="en-NL"/>
+          </a:p>
+        </p:txBody>
+      </p:sp>
+      <p:pic>
+        <p:nvPicPr>
+          <p:cNvPr id="5" name="Afbeelding 4">
+            <a:extLst>
+              <a:ext uri="{FF2B5EF4-FFF2-40B4-BE49-F238E27FC236}">
+                <a16:creationId xmlns:a16="http://schemas.microsoft.com/office/drawing/2014/main" id="{F4E62C20-9BC5-02BA-9438-B50D6830127C}"/>
+              </a:ext>
+            </a:extLst>
+          </p:cNvPr>
+          <p:cNvPicPr>
+            <a:picLocks noChangeAspect="1"/>
+          </p:cNvPicPr>
+          <p:nvPr/>
+        </p:nvPicPr>
+        <p:blipFill>
+          <a:blip r:embed="rId2"/>
+          <a:srcRect l="32075" r="24664"/>
+          <a:stretch>
+            <a:fillRect/>
+          </a:stretch>
+        </p:blipFill>
+        <p:spPr>
+          <a:xfrm>
+            <a:off x="2534291" y="1460242"/>
+            <a:ext cx="2174789" cy="5027055"/>
+          </a:xfrm>
+          <a:prstGeom prst="rect">
+            <a:avLst/>
+          </a:prstGeom>
+        </p:spPr>
+      </p:pic>
+      <p:pic>
+        <p:nvPicPr>
+          <p:cNvPr id="7" name="Afbeelding 6">
+            <a:extLst>
+              <a:ext uri="{FF2B5EF4-FFF2-40B4-BE49-F238E27FC236}">
+                <a16:creationId xmlns:a16="http://schemas.microsoft.com/office/drawing/2014/main" id="{03B3AE3A-D874-515E-D687-2CDB3F9F2717}"/>
+              </a:ext>
+            </a:extLst>
+          </p:cNvPr>
+          <p:cNvPicPr>
+            <a:picLocks noChangeAspect="1"/>
+          </p:cNvPicPr>
+          <p:nvPr/>
+        </p:nvPicPr>
+        <p:blipFill>
+          <a:blip r:embed="rId3"/>
+          <a:srcRect l="18233" r="16690"/>
+          <a:stretch>
+            <a:fillRect/>
+          </a:stretch>
+        </p:blipFill>
+        <p:spPr>
+          <a:xfrm>
+            <a:off x="4709080" y="1460241"/>
+            <a:ext cx="4361935" cy="5027055"/>
+          </a:xfrm>
+          <a:prstGeom prst="rect">
+            <a:avLst/>
+          </a:prstGeom>
+        </p:spPr>
+      </p:pic>
+    </p:spTree>
+    <p:extLst>
+      <p:ext uri="{BB962C8B-B14F-4D97-AF65-F5344CB8AC3E}">
+        <p14:creationId xmlns:p14="http://schemas.microsoft.com/office/powerpoint/2010/main" val="2479592436"/>
+      </p:ext>
+    </p:extLst>
+  </p:cSld>
+  <p:clrMapOvr>
+    <a:masterClrMapping/>
+  </p:clrMapOvr>
+</p:sld>
+</file>
+
+<file path=ppt/slides/slide7.xml><?xml version="1.0" encoding="utf-8"?>
+<p:sld xmlns:a="http://schemas.openxmlformats.org/drawingml/2006/main" xmlns:r="http://schemas.openxmlformats.org/officeDocument/2006/relationships" xmlns:p="http://schemas.openxmlformats.org/presentationml/2006/main">
+  <p:cSld>
+    <p:spTree>
+      <p:nvGrpSpPr>
+        <p:cNvPr id="1" name="">
+          <a:extLst>
+            <a:ext uri="{FF2B5EF4-FFF2-40B4-BE49-F238E27FC236}">
+              <a16:creationId xmlns:a16="http://schemas.microsoft.com/office/drawing/2014/main" id="{A4C89B1D-3BE2-51B7-EDE4-86DF2F3F9171}"/>
+            </a:ext>
+          </a:extLst>
+        </p:cNvPr>
+        <p:cNvGrpSpPr/>
+        <p:nvPr/>
+      </p:nvGrpSpPr>
+      <p:grpSpPr>
+        <a:xfrm>
+          <a:off x="0" y="0"/>
+          <a:ext cx="0" cy="0"/>
+          <a:chOff x="0" y="0"/>
+          <a:chExt cx="0" cy="0"/>
+        </a:xfrm>
+      </p:grpSpPr>
+      <p:sp>
+        <p:nvSpPr>
+          <p:cNvPr id="2" name="Title 1">
+            <a:extLst>
+              <a:ext uri="{FF2B5EF4-FFF2-40B4-BE49-F238E27FC236}">
+                <a16:creationId xmlns:a16="http://schemas.microsoft.com/office/drawing/2014/main" id="{50218823-5AA0-A2DF-1153-2BB3B3AD1C43}"/>
+              </a:ext>
+            </a:extLst>
+          </p:cNvPr>
+          <p:cNvSpPr>
+            <a:spLocks noGrp="1"/>
+          </p:cNvSpPr>
+          <p:nvPr>
+            <p:ph type="ctrTitle"/>
+          </p:nvPr>
+        </p:nvSpPr>
+        <p:spPr>
+          <a:xfrm>
+            <a:off x="2296554" y="368322"/>
+            <a:ext cx="8791575" cy="1056459"/>
+          </a:xfrm>
+        </p:spPr>
+        <p:txBody>
+          <a:bodyPr>
+            <a:normAutofit/>
+          </a:bodyPr>
+          <a:lstStyle/>
+          <a:p>
+            <a:r>
+              <a:rPr lang="nl-NL" sz="3200" dirty="0" err="1"/>
+              <a:t>MicroDexed</a:t>
+            </a:r>
+            <a:r>
+              <a:rPr lang="nl-NL" sz="3200" dirty="0"/>
+              <a:t> Touch</a:t>
+            </a:r>
+            <a:r>
+              <a:rPr lang="en-NL" sz="3200"/>
+              <a:t> </a:t>
+            </a:r>
+            <a:endParaRPr lang="en-NL" sz="3200" dirty="0"/>
+          </a:p>
+        </p:txBody>
+      </p:sp>
+      <p:sp>
+        <p:nvSpPr>
+          <p:cNvPr id="3" name="Subtitle 2">
+            <a:extLst>
+              <a:ext uri="{FF2B5EF4-FFF2-40B4-BE49-F238E27FC236}">
+                <a16:creationId xmlns:a16="http://schemas.microsoft.com/office/drawing/2014/main" id="{D26BCFDC-6716-567D-86DA-BA7236BA816D}"/>
+              </a:ext>
+            </a:extLst>
+          </p:cNvPr>
+          <p:cNvSpPr>
+            <a:spLocks noGrp="1"/>
+          </p:cNvSpPr>
+          <p:nvPr>
+            <p:ph type="subTitle" idx="1"/>
+          </p:nvPr>
+        </p:nvSpPr>
+        <p:spPr>
+          <a:xfrm>
+            <a:off x="2296554" y="1331506"/>
+            <a:ext cx="8688603" cy="1056459"/>
+          </a:xfrm>
+        </p:spPr>
+        <p:txBody>
+          <a:bodyPr/>
+          <a:lstStyle/>
+          <a:p>
+            <a:r>
+              <a:rPr lang="nl-NL" dirty="0">
+                <a:hlinkClick r:id="rId2"/>
+              </a:rPr>
+              <a:t>https://codeberg.org/positionhigh/MicroDexed-touch</a:t>
+            </a:r>
+            <a:endParaRPr lang="nl-NL" dirty="0"/>
+          </a:p>
+          <a:p>
+            <a:endParaRPr lang="en-NL"/>
+          </a:p>
+        </p:txBody>
+      </p:sp>
+      <p:pic>
+        <p:nvPicPr>
+          <p:cNvPr id="5" name="Afbeelding 4">
+            <a:extLst>
+              <a:ext uri="{FF2B5EF4-FFF2-40B4-BE49-F238E27FC236}">
+                <a16:creationId xmlns:a16="http://schemas.microsoft.com/office/drawing/2014/main" id="{3FE0B310-970F-8752-975B-6EE94E719F29}"/>
+              </a:ext>
+            </a:extLst>
+          </p:cNvPr>
+          <p:cNvPicPr>
+            <a:picLocks noChangeAspect="1"/>
+          </p:cNvPicPr>
+          <p:nvPr/>
+        </p:nvPicPr>
+        <p:blipFill>
+          <a:blip r:embed="rId3"/>
+          <a:srcRect r="48171"/>
+          <a:stretch>
+            <a:fillRect/>
+          </a:stretch>
+        </p:blipFill>
+        <p:spPr>
+          <a:xfrm>
+            <a:off x="6798854" y="2119427"/>
+            <a:ext cx="4028303" cy="3977282"/>
+          </a:xfrm>
+          <a:prstGeom prst="rect">
+            <a:avLst/>
+          </a:prstGeom>
+        </p:spPr>
+      </p:pic>
+      <p:pic>
+        <p:nvPicPr>
+          <p:cNvPr id="7" name="Afbeelding 6">
+            <a:extLst>
+              <a:ext uri="{FF2B5EF4-FFF2-40B4-BE49-F238E27FC236}">
+                <a16:creationId xmlns:a16="http://schemas.microsoft.com/office/drawing/2014/main" id="{637912F7-4D69-4AB6-8309-F79FD9133021}"/>
+              </a:ext>
+            </a:extLst>
+          </p:cNvPr>
+          <p:cNvPicPr>
+            <a:picLocks noChangeAspect="1"/>
+          </p:cNvPicPr>
+          <p:nvPr/>
+        </p:nvPicPr>
+        <p:blipFill>
+          <a:blip r:embed="rId4"/>
+          <a:stretch>
+            <a:fillRect/>
+          </a:stretch>
+        </p:blipFill>
+        <p:spPr>
+          <a:xfrm>
+            <a:off x="1700727" y="2128564"/>
+            <a:ext cx="4940128" cy="3699607"/>
+          </a:xfrm>
+          <a:prstGeom prst="rect">
+            <a:avLst/>
+          </a:prstGeom>
+        </p:spPr>
+      </p:pic>
+    </p:spTree>
+    <p:extLst>
+      <p:ext uri="{BB962C8B-B14F-4D97-AF65-F5344CB8AC3E}">
+        <p14:creationId xmlns:p14="http://schemas.microsoft.com/office/powerpoint/2010/main" val="645430323"/>
+      </p:ext>
+    </p:extLst>
+  </p:cSld>
+  <p:clrMapOvr>
+    <a:masterClrMapping/>
+  </p:clrMapOvr>
+</p:sld>
+</file>
+
+<file path=ppt/slides/slide8.xml><?xml version="1.0" encoding="utf-8"?>
+<p:sld xmlns:a="http://schemas.openxmlformats.org/drawingml/2006/main" xmlns:r="http://schemas.openxmlformats.org/officeDocument/2006/relationships" xmlns:p="http://schemas.openxmlformats.org/presentationml/2006/main">
+  <p:cSld>
+    <p:spTree>
+      <p:nvGrpSpPr>
         <p:cNvPr id="1" name=""/>
         <p:cNvGrpSpPr/>
         <p:nvPr/>
@@ -13091,7 +14314,12 @@
             <p:ph type="ctrTitle"/>
           </p:nvPr>
         </p:nvSpPr>
-        <p:spPr/>
+        <p:spPr>
+          <a:xfrm>
+            <a:off x="1876424" y="1122363"/>
+            <a:ext cx="8791575" cy="1460199"/>
+          </a:xfrm>
+        </p:spPr>
         <p:txBody>
           <a:bodyPr/>
           <a:lstStyle/>
@@ -13119,10 +14347,29 @@
             <p:ph type="subTitle" idx="1"/>
           </p:nvPr>
         </p:nvSpPr>
-        <p:spPr/>
+        <p:spPr>
+          <a:xfrm>
+            <a:off x="1876424" y="2755557"/>
+            <a:ext cx="8791575" cy="2502243"/>
+          </a:xfrm>
+        </p:spPr>
         <p:txBody>
           <a:bodyPr/>
           <a:lstStyle/>
+          <a:p>
+            <a:r>
+              <a:rPr lang="nl-NL" dirty="0">
+                <a:latin typeface="Arial" panose="020B0604020202020204" pitchFamily="34" charset="0"/>
+                <a:cs typeface="Arial" panose="020B0604020202020204" pitchFamily="34" charset="0"/>
+                <a:hlinkClick r:id="rId2"/>
+              </a:rPr>
+              <a:t>https://github.com/earlephilhower/arduino-pico</a:t>
+            </a:r>
+            <a:endParaRPr lang="nl-NL" dirty="0">
+              <a:latin typeface="Arial" panose="020B0604020202020204" pitchFamily="34" charset="0"/>
+              <a:cs typeface="Arial" panose="020B0604020202020204" pitchFamily="34" charset="0"/>
+            </a:endParaRPr>
+          </a:p>
           <a:p>
             <a:endParaRPr lang="en-NL" dirty="0">
               <a:latin typeface="Arial" panose="020B0604020202020204" pitchFamily="34" charset="0"/>
@@ -13144,7 +14391,7 @@
 </p:sld>
 </file>
 
-<file path=ppt/slides/slide3.xml><?xml version="1.0" encoding="utf-8"?>
+<file path=ppt/slides/slide9.xml><?xml version="1.0" encoding="utf-8"?>
 <p:sld xmlns:a="http://schemas.openxmlformats.org/drawingml/2006/main" xmlns:r="http://schemas.openxmlformats.org/officeDocument/2006/relationships" xmlns:p="http://schemas.openxmlformats.org/presentationml/2006/main">
   <p:cSld>
     <p:spTree>
@@ -13183,7 +14430,12 @@
             <p:ph type="ctrTitle"/>
           </p:nvPr>
         </p:nvSpPr>
-        <p:spPr/>
+        <p:spPr>
+          <a:xfrm>
+            <a:off x="1876424" y="395416"/>
+            <a:ext cx="8791575" cy="963827"/>
+          </a:xfrm>
+        </p:spPr>
         <p:txBody>
           <a:bodyPr>
             <a:normAutofit/>
@@ -13213,11 +14465,87 @@
             <p:ph type="subTitle" idx="1"/>
           </p:nvPr>
         </p:nvSpPr>
-        <p:spPr/>
+        <p:spPr>
+          <a:xfrm>
+            <a:off x="1876424" y="1482811"/>
+            <a:ext cx="8791575" cy="4732638"/>
+          </a:xfrm>
+        </p:spPr>
         <p:txBody>
-          <a:bodyPr/>
+          <a:bodyPr>
+            <a:normAutofit fontScale="92500" lnSpcReduction="20000"/>
+          </a:bodyPr>
           <a:lstStyle/>
           <a:p>
+            <a:endParaRPr lang="nl-NL" dirty="0"/>
+          </a:p>
+          <a:p>
+            <a:r>
+              <a:rPr lang="nl-NL" dirty="0"/>
+              <a:t>Circuitpython</a:t>
+            </a:r>
+          </a:p>
+          <a:p>
+            <a:r>
+              <a:rPr lang="nl-NL" dirty="0">
+                <a:hlinkClick r:id="rId2"/>
+              </a:rPr>
+              <a:t>https://circuitpython.org</a:t>
+            </a:r>
+            <a:endParaRPr lang="nl-NL" dirty="0"/>
+          </a:p>
+          <a:p>
+            <a:endParaRPr lang="nl-NL" dirty="0"/>
+          </a:p>
+          <a:p>
+            <a:r>
+              <a:rPr lang="nl-NL" dirty="0"/>
+              <a:t>Mu editor</a:t>
+            </a:r>
+          </a:p>
+          <a:p>
+            <a:r>
+              <a:rPr lang="nl-NL" dirty="0">
+                <a:hlinkClick r:id="rId3"/>
+              </a:rPr>
+              <a:t>https://codewith.mu</a:t>
+            </a:r>
+            <a:endParaRPr lang="nl-NL" dirty="0"/>
+          </a:p>
+          <a:p>
+            <a:endParaRPr lang="nl-NL" dirty="0"/>
+          </a:p>
+          <a:p>
+            <a:r>
+              <a:rPr lang="nl-NL" dirty="0" err="1"/>
+              <a:t>VSCode</a:t>
+            </a:r>
+            <a:endParaRPr lang="nl-NL" dirty="0"/>
+          </a:p>
+          <a:p>
+            <a:r>
+              <a:rPr lang="nl-NL" dirty="0">
+                <a:hlinkClick r:id="rId4"/>
+              </a:rPr>
+              <a:t>https://code.visualstudio.com</a:t>
+            </a:r>
+            <a:endParaRPr lang="nl-NL" dirty="0"/>
+          </a:p>
+          <a:p>
+            <a:r>
+              <a:rPr lang="nl-NL" dirty="0"/>
+              <a:t>+</a:t>
+            </a:r>
+          </a:p>
+          <a:p>
+            <a:r>
+              <a:rPr lang="nl-NL" dirty="0" err="1"/>
+              <a:t>CircuitPython</a:t>
+            </a:r>
+            <a:r>
+              <a:rPr lang="nl-NL" dirty="0"/>
+              <a:t> extension</a:t>
+            </a:r>
             <a:endParaRPr lang="en-NL"/>
           </a:p>
         </p:txBody>
@@ -13226,112 +14554,6 @@
     <p:extLst>
       <p:ext uri="{BB962C8B-B14F-4D97-AF65-F5344CB8AC3E}">
         <p14:creationId xmlns:p14="http://schemas.microsoft.com/office/powerpoint/2010/main" val="3750335007"/>
-      </p:ext>
-    </p:extLst>
-  </p:cSld>
-  <p:clrMapOvr>
-    <a:masterClrMapping/>
-  </p:clrMapOvr>
-</p:sld>
-</file>
-
-<file path=ppt/slides/slide4.xml><?xml version="1.0" encoding="utf-8"?>
-<p:sld xmlns:a="http://schemas.openxmlformats.org/drawingml/2006/main" xmlns:r="http://schemas.openxmlformats.org/officeDocument/2006/relationships" xmlns:p="http://schemas.openxmlformats.org/presentationml/2006/main">
-  <p:cSld>
-    <p:spTree>
-      <p:nvGrpSpPr>
-        <p:cNvPr id="1" name="">
-          <a:extLst>
-            <a:ext uri="{FF2B5EF4-FFF2-40B4-BE49-F238E27FC236}">
-              <a16:creationId xmlns:a16="http://schemas.microsoft.com/office/drawing/2014/main" id="{F2CB6C93-F91E-B0BB-FBF4-28F56E6085F2}"/>
-            </a:ext>
-          </a:extLst>
-        </p:cNvPr>
-        <p:cNvGrpSpPr/>
-        <p:nvPr/>
-      </p:nvGrpSpPr>
-      <p:grpSpPr>
-        <a:xfrm>
-          <a:off x="0" y="0"/>
-          <a:ext cx="0" cy="0"/>
-          <a:chOff x="0" y="0"/>
-          <a:chExt cx="0" cy="0"/>
-        </a:xfrm>
-      </p:grpSpPr>
-      <p:sp>
-        <p:nvSpPr>
-          <p:cNvPr id="2" name="Title 1">
-            <a:extLst>
-              <a:ext uri="{FF2B5EF4-FFF2-40B4-BE49-F238E27FC236}">
-                <a16:creationId xmlns:a16="http://schemas.microsoft.com/office/drawing/2014/main" id="{8C7FF1C8-6395-9A6A-8561-6DEB1399F994}"/>
-              </a:ext>
-            </a:extLst>
-          </p:cNvPr>
-          <p:cNvSpPr>
-            <a:spLocks noGrp="1"/>
-          </p:cNvSpPr>
-          <p:nvPr>
-            <p:ph type="ctrTitle"/>
-          </p:nvPr>
-        </p:nvSpPr>
-        <p:spPr/>
-        <p:txBody>
-          <a:bodyPr>
-            <a:normAutofit/>
-          </a:bodyPr>
-          <a:lstStyle/>
-          <a:p>
-            <a:r>
-              <a:rPr lang="en-NL" sz="3200" dirty="0"/>
-              <a:t>Arduino libraries</a:t>
-            </a:r>
-          </a:p>
-        </p:txBody>
-      </p:sp>
-      <p:sp>
-        <p:nvSpPr>
-          <p:cNvPr id="3" name="Subtitle 2">
-            <a:extLst>
-              <a:ext uri="{FF2B5EF4-FFF2-40B4-BE49-F238E27FC236}">
-                <a16:creationId xmlns:a16="http://schemas.microsoft.com/office/drawing/2014/main" id="{B81F2779-DBBC-FF09-47BE-21BA89176258}"/>
-              </a:ext>
-            </a:extLst>
-          </p:cNvPr>
-          <p:cNvSpPr>
-            <a:spLocks noGrp="1"/>
-          </p:cNvSpPr>
-          <p:nvPr>
-            <p:ph type="subTitle" idx="1"/>
-          </p:nvPr>
-        </p:nvSpPr>
-        <p:spPr/>
-        <p:txBody>
-          <a:bodyPr/>
-          <a:lstStyle/>
-          <a:p>
-            <a:r>
-              <a:rPr lang="en-NL" dirty="0"/>
-              <a:t>Touchytouch</a:t>
-            </a:r>
-          </a:p>
-          <a:p>
-            <a:r>
-              <a:rPr lang="en-NL" dirty="0"/>
-              <a:t>AMY</a:t>
-            </a:r>
-          </a:p>
-          <a:p>
-            <a:r>
-              <a:rPr lang="en-NL" dirty="0"/>
-              <a:t>Mozzi</a:t>
-            </a:r>
-          </a:p>
-        </p:txBody>
-      </p:sp>
-    </p:spTree>
-    <p:extLst>
-      <p:ext uri="{BB962C8B-B14F-4D97-AF65-F5344CB8AC3E}">
-        <p14:creationId xmlns:p14="http://schemas.microsoft.com/office/powerpoint/2010/main" val="845005868"/>
       </p:ext>
     </p:extLst>
   </p:cSld>
